--- a/문서/WatchService_Agent_Presentation.pptx
+++ b/문서/WatchService_Agent_Presentation.pptx
@@ -5,13 +5,13 @@
     <p:sldMasterId id="2147483648" r:id="rId1"/>
   </p:sldMasterIdLst>
   <p:sldIdLst>
-    <p:sldId id="256" r:id="rId7"/>
-    <p:sldId id="257" r:id="rId8"/>
-    <p:sldId id="258" r:id="rId9"/>
-    <p:sldId id="259" r:id="rId10"/>
-    <p:sldId id="260" r:id="rId11"/>
+    <p:sldId id="256" r:id="rId2"/>
+    <p:sldId id="257" r:id="rId3"/>
+    <p:sldId id="258" r:id="rId4"/>
+    <p:sldId id="259" r:id="rId5"/>
+    <p:sldId id="260" r:id="rId6"/>
   </p:sldIdLst>
-  <p:sldSz cx="12188952" cy="6858000" type="screen4x3"/>
+  <p:sldSz cx="12188825" cy="6858000"/>
   <p:notesSz cx="6858000" cy="9144000"/>
   <p:defaultTextStyle>
     <a:defPPr>
@@ -108,6 +108,22 @@
       </a:defRPr>
     </a:lvl9pPr>
   </p:defaultTextStyle>
+  <p:extLst>
+    <p:ext uri="{EFAFB233-063F-42B5-8137-9DF3F51BA10A}">
+      <p15:sldGuideLst xmlns:p15="http://schemas.microsoft.com/office/powerpoint/2012/main">
+        <p15:guide id="1" orient="horz" pos="2160">
+          <p15:clr>
+            <a:srgbClr val="A4A3A4"/>
+          </p15:clr>
+        </p15:guide>
+        <p15:guide id="2" pos="2880">
+          <p15:clr>
+            <a:srgbClr val="A4A3A4"/>
+          </p15:clr>
+        </p15:guide>
+      </p15:sldGuideLst>
+    </p:ext>
+  </p:extLst>
 </p:presentation>
 </file>
 
@@ -149,10 +165,9 @@
           <a:lstStyle/>
           <a:p>
             <a:r>
-              <a:rPr lang="en-US" smtClean="0"/>
+              <a:rPr lang="en-US"/>
               <a:t>Click to edit Master title style</a:t>
             </a:r>
-            <a:endParaRPr lang="en-US"/>
           </a:p>
         </p:txBody>
       </p:sp>
@@ -268,10 +283,9 @@
           </a:lstStyle>
           <a:p>
             <a:r>
-              <a:rPr lang="en-US" smtClean="0"/>
+              <a:rPr lang="en-US"/>
               <a:t>Click to edit Master subtitle style</a:t>
             </a:r>
-            <a:endParaRPr lang="en-US"/>
           </a:p>
         </p:txBody>
       </p:sp>
@@ -292,7 +306,7 @@
           <a:p>
             <a:fld id="{5BCAD085-E8A6-8845-BD4E-CB4CCA059FC4}" type="datetimeFigureOut">
               <a:rPr lang="en-US" smtClean="0"/>
-              <a:t>1/27/13</a:t>
+              <a:t>6/15/26</a:t>
             </a:fld>
             <a:endParaRPr lang="en-US"/>
           </a:p>
@@ -386,10 +400,9 @@
           <a:lstStyle/>
           <a:p>
             <a:r>
-              <a:rPr lang="en-US" smtClean="0"/>
+              <a:rPr lang="en-US"/>
               <a:t>Click to edit Master title style</a:t>
             </a:r>
-            <a:endParaRPr lang="en-US"/>
           </a:p>
         </p:txBody>
       </p:sp>
@@ -410,38 +423,37 @@
           <a:p>
             <a:pPr lvl="0"/>
             <a:r>
-              <a:rPr lang="en-US" smtClean="0"/>
+              <a:rPr lang="en-US"/>
               <a:t>Click to edit Master text styles</a:t>
             </a:r>
           </a:p>
           <a:p>
             <a:pPr lvl="1"/>
             <a:r>
-              <a:rPr lang="en-US" smtClean="0"/>
+              <a:rPr lang="en-US"/>
               <a:t>Second level</a:t>
             </a:r>
           </a:p>
           <a:p>
             <a:pPr lvl="2"/>
             <a:r>
-              <a:rPr lang="en-US" smtClean="0"/>
+              <a:rPr lang="en-US"/>
               <a:t>Third level</a:t>
             </a:r>
           </a:p>
           <a:p>
             <a:pPr lvl="3"/>
             <a:r>
-              <a:rPr lang="en-US" smtClean="0"/>
+              <a:rPr lang="en-US"/>
               <a:t>Fourth level</a:t>
             </a:r>
           </a:p>
           <a:p>
             <a:pPr lvl="4"/>
             <a:r>
-              <a:rPr lang="en-US" smtClean="0"/>
+              <a:rPr lang="en-US"/>
               <a:t>Fifth level</a:t>
             </a:r>
-            <a:endParaRPr lang="en-US"/>
           </a:p>
         </p:txBody>
       </p:sp>
@@ -462,7 +474,7 @@
           <a:p>
             <a:fld id="{5BCAD085-E8A6-8845-BD4E-CB4CCA059FC4}" type="datetimeFigureOut">
               <a:rPr lang="en-US" smtClean="0"/>
-              <a:t>1/27/13</a:t>
+              <a:t>6/15/26</a:t>
             </a:fld>
             <a:endParaRPr lang="en-US"/>
           </a:p>
@@ -561,10 +573,9 @@
           <a:lstStyle/>
           <a:p>
             <a:r>
-              <a:rPr lang="en-US" smtClean="0"/>
+              <a:rPr lang="en-US"/>
               <a:t>Click to edit Master title style</a:t>
             </a:r>
-            <a:endParaRPr lang="en-US"/>
           </a:p>
         </p:txBody>
       </p:sp>
@@ -590,38 +601,37 @@
           <a:p>
             <a:pPr lvl="0"/>
             <a:r>
-              <a:rPr lang="en-US" smtClean="0"/>
+              <a:rPr lang="en-US"/>
               <a:t>Click to edit Master text styles</a:t>
             </a:r>
           </a:p>
           <a:p>
             <a:pPr lvl="1"/>
             <a:r>
-              <a:rPr lang="en-US" smtClean="0"/>
+              <a:rPr lang="en-US"/>
               <a:t>Second level</a:t>
             </a:r>
           </a:p>
           <a:p>
             <a:pPr lvl="2"/>
             <a:r>
-              <a:rPr lang="en-US" smtClean="0"/>
+              <a:rPr lang="en-US"/>
               <a:t>Third level</a:t>
             </a:r>
           </a:p>
           <a:p>
             <a:pPr lvl="3"/>
             <a:r>
-              <a:rPr lang="en-US" smtClean="0"/>
+              <a:rPr lang="en-US"/>
               <a:t>Fourth level</a:t>
             </a:r>
           </a:p>
           <a:p>
             <a:pPr lvl="4"/>
             <a:r>
-              <a:rPr lang="en-US" smtClean="0"/>
+              <a:rPr lang="en-US"/>
               <a:t>Fifth level</a:t>
             </a:r>
-            <a:endParaRPr lang="en-US"/>
           </a:p>
         </p:txBody>
       </p:sp>
@@ -642,7 +652,7 @@
           <a:p>
             <a:fld id="{5BCAD085-E8A6-8845-BD4E-CB4CCA059FC4}" type="datetimeFigureOut">
               <a:rPr lang="en-US" smtClean="0"/>
-              <a:t>1/27/13</a:t>
+              <a:t>6/15/26</a:t>
             </a:fld>
             <a:endParaRPr lang="en-US"/>
           </a:p>
@@ -736,10 +746,9 @@
           <a:lstStyle/>
           <a:p>
             <a:r>
-              <a:rPr lang="en-US" smtClean="0"/>
+              <a:rPr lang="en-US"/>
               <a:t>Click to edit Master title style</a:t>
             </a:r>
-            <a:endParaRPr lang="en-US"/>
           </a:p>
         </p:txBody>
       </p:sp>
@@ -760,38 +769,37 @@
           <a:p>
             <a:pPr lvl="0"/>
             <a:r>
-              <a:rPr lang="en-US" smtClean="0"/>
+              <a:rPr lang="en-US"/>
               <a:t>Click to edit Master text styles</a:t>
             </a:r>
           </a:p>
           <a:p>
             <a:pPr lvl="1"/>
             <a:r>
-              <a:rPr lang="en-US" smtClean="0"/>
+              <a:rPr lang="en-US"/>
               <a:t>Second level</a:t>
             </a:r>
           </a:p>
           <a:p>
             <a:pPr lvl="2"/>
             <a:r>
-              <a:rPr lang="en-US" smtClean="0"/>
+              <a:rPr lang="en-US"/>
               <a:t>Third level</a:t>
             </a:r>
           </a:p>
           <a:p>
             <a:pPr lvl="3"/>
             <a:r>
-              <a:rPr lang="en-US" smtClean="0"/>
+              <a:rPr lang="en-US"/>
               <a:t>Fourth level</a:t>
             </a:r>
           </a:p>
           <a:p>
             <a:pPr lvl="4"/>
             <a:r>
-              <a:rPr lang="en-US" smtClean="0"/>
+              <a:rPr lang="en-US"/>
               <a:t>Fifth level</a:t>
             </a:r>
-            <a:endParaRPr lang="en-US"/>
           </a:p>
         </p:txBody>
       </p:sp>
@@ -812,7 +820,7 @@
           <a:p>
             <a:fld id="{5BCAD085-E8A6-8845-BD4E-CB4CCA059FC4}" type="datetimeFigureOut">
               <a:rPr lang="en-US" smtClean="0"/>
-              <a:t>1/27/13</a:t>
+              <a:t>6/15/26</a:t>
             </a:fld>
             <a:endParaRPr lang="en-US"/>
           </a:p>
@@ -915,10 +923,9 @@
           </a:lstStyle>
           <a:p>
             <a:r>
-              <a:rPr lang="en-US" smtClean="0"/>
+              <a:rPr lang="en-US"/>
               <a:t>Click to edit Master title style</a:t>
             </a:r>
-            <a:endParaRPr lang="en-US"/>
           </a:p>
         </p:txBody>
       </p:sp>
@@ -1035,7 +1042,7 @@
           <a:p>
             <a:pPr lvl="0"/>
             <a:r>
-              <a:rPr lang="en-US" smtClean="0"/>
+              <a:rPr lang="en-US"/>
               <a:t>Click to edit Master text styles</a:t>
             </a:r>
           </a:p>
@@ -1058,7 +1065,7 @@
           <a:p>
             <a:fld id="{5BCAD085-E8A6-8845-BD4E-CB4CCA059FC4}" type="datetimeFigureOut">
               <a:rPr lang="en-US" smtClean="0"/>
-              <a:t>1/27/13</a:t>
+              <a:t>6/15/26</a:t>
             </a:fld>
             <a:endParaRPr lang="en-US"/>
           </a:p>
@@ -1152,10 +1159,9 @@
           <a:lstStyle/>
           <a:p>
             <a:r>
-              <a:rPr lang="en-US" smtClean="0"/>
+              <a:rPr lang="en-US"/>
               <a:t>Click to edit Master title style</a:t>
             </a:r>
-            <a:endParaRPr lang="en-US"/>
           </a:p>
         </p:txBody>
       </p:sp>
@@ -1209,38 +1215,37 @@
           <a:p>
             <a:pPr lvl="0"/>
             <a:r>
-              <a:rPr lang="en-US" smtClean="0"/>
+              <a:rPr lang="en-US"/>
               <a:t>Click to edit Master text styles</a:t>
             </a:r>
           </a:p>
           <a:p>
             <a:pPr lvl="1"/>
             <a:r>
-              <a:rPr lang="en-US" smtClean="0"/>
+              <a:rPr lang="en-US"/>
               <a:t>Second level</a:t>
             </a:r>
           </a:p>
           <a:p>
             <a:pPr lvl="2"/>
             <a:r>
-              <a:rPr lang="en-US" smtClean="0"/>
+              <a:rPr lang="en-US"/>
               <a:t>Third level</a:t>
             </a:r>
           </a:p>
           <a:p>
             <a:pPr lvl="3"/>
             <a:r>
-              <a:rPr lang="en-US" smtClean="0"/>
+              <a:rPr lang="en-US"/>
               <a:t>Fourth level</a:t>
             </a:r>
           </a:p>
           <a:p>
             <a:pPr lvl="4"/>
             <a:r>
-              <a:rPr lang="en-US" smtClean="0"/>
+              <a:rPr lang="en-US"/>
               <a:t>Fifth level</a:t>
             </a:r>
-            <a:endParaRPr lang="en-US"/>
           </a:p>
         </p:txBody>
       </p:sp>
@@ -1294,38 +1299,37 @@
           <a:p>
             <a:pPr lvl="0"/>
             <a:r>
-              <a:rPr lang="en-US" smtClean="0"/>
+              <a:rPr lang="en-US"/>
               <a:t>Click to edit Master text styles</a:t>
             </a:r>
           </a:p>
           <a:p>
             <a:pPr lvl="1"/>
             <a:r>
-              <a:rPr lang="en-US" smtClean="0"/>
+              <a:rPr lang="en-US"/>
               <a:t>Second level</a:t>
             </a:r>
           </a:p>
           <a:p>
             <a:pPr lvl="2"/>
             <a:r>
-              <a:rPr lang="en-US" smtClean="0"/>
+              <a:rPr lang="en-US"/>
               <a:t>Third level</a:t>
             </a:r>
           </a:p>
           <a:p>
             <a:pPr lvl="3"/>
             <a:r>
-              <a:rPr lang="en-US" smtClean="0"/>
+              <a:rPr lang="en-US"/>
               <a:t>Fourth level</a:t>
             </a:r>
           </a:p>
           <a:p>
             <a:pPr lvl="4"/>
             <a:r>
-              <a:rPr lang="en-US" smtClean="0"/>
+              <a:rPr lang="en-US"/>
               <a:t>Fifth level</a:t>
             </a:r>
-            <a:endParaRPr lang="en-US"/>
           </a:p>
         </p:txBody>
       </p:sp>
@@ -1346,7 +1350,7 @@
           <a:p>
             <a:fld id="{5BCAD085-E8A6-8845-BD4E-CB4CCA059FC4}" type="datetimeFigureOut">
               <a:rPr lang="en-US" smtClean="0"/>
-              <a:t>1/27/13</a:t>
+              <a:t>6/15/26</a:t>
             </a:fld>
             <a:endParaRPr lang="en-US"/>
           </a:p>
@@ -1444,10 +1448,9 @@
           </a:lstStyle>
           <a:p>
             <a:r>
-              <a:rPr lang="en-US" smtClean="0"/>
+              <a:rPr lang="en-US"/>
               <a:t>Click to edit Master title style</a:t>
             </a:r>
-            <a:endParaRPr lang="en-US"/>
           </a:p>
         </p:txBody>
       </p:sp>
@@ -1510,7 +1513,7 @@
           <a:p>
             <a:pPr lvl="0"/>
             <a:r>
-              <a:rPr lang="en-US" smtClean="0"/>
+              <a:rPr lang="en-US"/>
               <a:t>Click to edit Master text styles</a:t>
             </a:r>
           </a:p>
@@ -1566,38 +1569,37 @@
           <a:p>
             <a:pPr lvl="0"/>
             <a:r>
-              <a:rPr lang="en-US" smtClean="0"/>
+              <a:rPr lang="en-US"/>
               <a:t>Click to edit Master text styles</a:t>
             </a:r>
           </a:p>
           <a:p>
             <a:pPr lvl="1"/>
             <a:r>
-              <a:rPr lang="en-US" smtClean="0"/>
+              <a:rPr lang="en-US"/>
               <a:t>Second level</a:t>
             </a:r>
           </a:p>
           <a:p>
             <a:pPr lvl="2"/>
             <a:r>
-              <a:rPr lang="en-US" smtClean="0"/>
+              <a:rPr lang="en-US"/>
               <a:t>Third level</a:t>
             </a:r>
           </a:p>
           <a:p>
             <a:pPr lvl="3"/>
             <a:r>
-              <a:rPr lang="en-US" smtClean="0"/>
+              <a:rPr lang="en-US"/>
               <a:t>Fourth level</a:t>
             </a:r>
           </a:p>
           <a:p>
             <a:pPr lvl="4"/>
             <a:r>
-              <a:rPr lang="en-US" smtClean="0"/>
+              <a:rPr lang="en-US"/>
               <a:t>Fifth level</a:t>
             </a:r>
-            <a:endParaRPr lang="en-US"/>
           </a:p>
         </p:txBody>
       </p:sp>
@@ -1660,7 +1662,7 @@
           <a:p>
             <a:pPr lvl="0"/>
             <a:r>
-              <a:rPr lang="en-US" smtClean="0"/>
+              <a:rPr lang="en-US"/>
               <a:t>Click to edit Master text styles</a:t>
             </a:r>
           </a:p>
@@ -1716,38 +1718,37 @@
           <a:p>
             <a:pPr lvl="0"/>
             <a:r>
-              <a:rPr lang="en-US" smtClean="0"/>
+              <a:rPr lang="en-US"/>
               <a:t>Click to edit Master text styles</a:t>
             </a:r>
           </a:p>
           <a:p>
             <a:pPr lvl="1"/>
             <a:r>
-              <a:rPr lang="en-US" smtClean="0"/>
+              <a:rPr lang="en-US"/>
               <a:t>Second level</a:t>
             </a:r>
           </a:p>
           <a:p>
             <a:pPr lvl="2"/>
             <a:r>
-              <a:rPr lang="en-US" smtClean="0"/>
+              <a:rPr lang="en-US"/>
               <a:t>Third level</a:t>
             </a:r>
           </a:p>
           <a:p>
             <a:pPr lvl="3"/>
             <a:r>
-              <a:rPr lang="en-US" smtClean="0"/>
+              <a:rPr lang="en-US"/>
               <a:t>Fourth level</a:t>
             </a:r>
           </a:p>
           <a:p>
             <a:pPr lvl="4"/>
             <a:r>
-              <a:rPr lang="en-US" smtClean="0"/>
+              <a:rPr lang="en-US"/>
               <a:t>Fifth level</a:t>
             </a:r>
-            <a:endParaRPr lang="en-US"/>
           </a:p>
         </p:txBody>
       </p:sp>
@@ -1768,7 +1769,7 @@
           <a:p>
             <a:fld id="{5BCAD085-E8A6-8845-BD4E-CB4CCA059FC4}" type="datetimeFigureOut">
               <a:rPr lang="en-US" smtClean="0"/>
-              <a:t>1/27/13</a:t>
+              <a:t>6/15/26</a:t>
             </a:fld>
             <a:endParaRPr lang="en-US"/>
           </a:p>
@@ -1862,10 +1863,9 @@
           <a:lstStyle/>
           <a:p>
             <a:r>
-              <a:rPr lang="en-US" smtClean="0"/>
+              <a:rPr lang="en-US"/>
               <a:t>Click to edit Master title style</a:t>
             </a:r>
-            <a:endParaRPr lang="en-US"/>
           </a:p>
         </p:txBody>
       </p:sp>
@@ -1886,7 +1886,7 @@
           <a:p>
             <a:fld id="{5BCAD085-E8A6-8845-BD4E-CB4CCA059FC4}" type="datetimeFigureOut">
               <a:rPr lang="en-US" smtClean="0"/>
-              <a:t>1/27/13</a:t>
+              <a:t>6/15/26</a:t>
             </a:fld>
             <a:endParaRPr lang="en-US"/>
           </a:p>
@@ -1981,7 +1981,7 @@
           <a:p>
             <a:fld id="{5BCAD085-E8A6-8845-BD4E-CB4CCA059FC4}" type="datetimeFigureOut">
               <a:rPr lang="en-US" smtClean="0"/>
-              <a:t>1/27/13</a:t>
+              <a:t>6/15/26</a:t>
             </a:fld>
             <a:endParaRPr lang="en-US"/>
           </a:p>
@@ -2084,10 +2084,9 @@
           </a:lstStyle>
           <a:p>
             <a:r>
-              <a:rPr lang="en-US" smtClean="0"/>
+              <a:rPr lang="en-US"/>
               <a:t>Click to edit Master title style</a:t>
             </a:r>
-            <a:endParaRPr lang="en-US"/>
           </a:p>
         </p:txBody>
       </p:sp>
@@ -2141,38 +2140,37 @@
           <a:p>
             <a:pPr lvl="0"/>
             <a:r>
-              <a:rPr lang="en-US" smtClean="0"/>
+              <a:rPr lang="en-US"/>
               <a:t>Click to edit Master text styles</a:t>
             </a:r>
           </a:p>
           <a:p>
             <a:pPr lvl="1"/>
             <a:r>
-              <a:rPr lang="en-US" smtClean="0"/>
+              <a:rPr lang="en-US"/>
               <a:t>Second level</a:t>
             </a:r>
           </a:p>
           <a:p>
             <a:pPr lvl="2"/>
             <a:r>
-              <a:rPr lang="en-US" smtClean="0"/>
+              <a:rPr lang="en-US"/>
               <a:t>Third level</a:t>
             </a:r>
           </a:p>
           <a:p>
             <a:pPr lvl="3"/>
             <a:r>
-              <a:rPr lang="en-US" smtClean="0"/>
+              <a:rPr lang="en-US"/>
               <a:t>Fourth level</a:t>
             </a:r>
           </a:p>
           <a:p>
             <a:pPr lvl="4"/>
             <a:r>
-              <a:rPr lang="en-US" smtClean="0"/>
+              <a:rPr lang="en-US"/>
               <a:t>Fifth level</a:t>
             </a:r>
-            <a:endParaRPr lang="en-US"/>
           </a:p>
         </p:txBody>
       </p:sp>
@@ -2235,7 +2233,7 @@
           <a:p>
             <a:pPr lvl="0"/>
             <a:r>
-              <a:rPr lang="en-US" smtClean="0"/>
+              <a:rPr lang="en-US"/>
               <a:t>Click to edit Master text styles</a:t>
             </a:r>
           </a:p>
@@ -2258,7 +2256,7 @@
           <a:p>
             <a:fld id="{5BCAD085-E8A6-8845-BD4E-CB4CCA059FC4}" type="datetimeFigureOut">
               <a:rPr lang="en-US" smtClean="0"/>
-              <a:t>1/27/13</a:t>
+              <a:t>6/15/26</a:t>
             </a:fld>
             <a:endParaRPr lang="en-US"/>
           </a:p>
@@ -2361,10 +2359,9 @@
           </a:lstStyle>
           <a:p>
             <a:r>
-              <a:rPr lang="en-US" smtClean="0"/>
+              <a:rPr lang="en-US"/>
               <a:t>Click to edit Master title style</a:t>
             </a:r>
-            <a:endParaRPr lang="en-US"/>
           </a:p>
         </p:txBody>
       </p:sp>
@@ -2488,7 +2485,7 @@
           <a:p>
             <a:pPr lvl="0"/>
             <a:r>
-              <a:rPr lang="en-US" smtClean="0"/>
+              <a:rPr lang="en-US"/>
               <a:t>Click to edit Master text styles</a:t>
             </a:r>
           </a:p>
@@ -2511,7 +2508,7 @@
           <a:p>
             <a:fld id="{5BCAD085-E8A6-8845-BD4E-CB4CCA059FC4}" type="datetimeFigureOut">
               <a:rPr lang="en-US" smtClean="0"/>
-              <a:t>1/27/13</a:t>
+              <a:t>6/15/26</a:t>
             </a:fld>
             <a:endParaRPr lang="en-US"/>
           </a:p>
@@ -2620,10 +2617,9 @@
           <a:lstStyle/>
           <a:p>
             <a:r>
-              <a:rPr lang="en-US" smtClean="0"/>
+              <a:rPr lang="en-US"/>
               <a:t>Click to edit Master title style</a:t>
             </a:r>
-            <a:endParaRPr lang="en-US"/>
           </a:p>
         </p:txBody>
       </p:sp>
@@ -2654,38 +2650,37 @@
           <a:p>
             <a:pPr lvl="0"/>
             <a:r>
-              <a:rPr lang="en-US" smtClean="0"/>
+              <a:rPr lang="en-US"/>
               <a:t>Click to edit Master text styles</a:t>
             </a:r>
           </a:p>
           <a:p>
             <a:pPr lvl="1"/>
             <a:r>
-              <a:rPr lang="en-US" smtClean="0"/>
+              <a:rPr lang="en-US"/>
               <a:t>Second level</a:t>
             </a:r>
           </a:p>
           <a:p>
             <a:pPr lvl="2"/>
             <a:r>
-              <a:rPr lang="en-US" smtClean="0"/>
+              <a:rPr lang="en-US"/>
               <a:t>Third level</a:t>
             </a:r>
           </a:p>
           <a:p>
             <a:pPr lvl="3"/>
             <a:r>
-              <a:rPr lang="en-US" smtClean="0"/>
+              <a:rPr lang="en-US"/>
               <a:t>Fourth level</a:t>
             </a:r>
           </a:p>
           <a:p>
             <a:pPr lvl="4"/>
             <a:r>
-              <a:rPr lang="en-US" smtClean="0"/>
+              <a:rPr lang="en-US"/>
               <a:t>Fifth level</a:t>
             </a:r>
-            <a:endParaRPr lang="en-US"/>
           </a:p>
         </p:txBody>
       </p:sp>
@@ -2724,7 +2719,7 @@
           <a:p>
             <a:fld id="{5BCAD085-E8A6-8845-BD4E-CB4CCA059FC4}" type="datetimeFigureOut">
               <a:rPr lang="en-US" smtClean="0"/>
-              <a:t>1/27/13</a:t>
+              <a:t>6/15/26</a:t>
             </a:fld>
             <a:endParaRPr lang="en-US"/>
           </a:p>
@@ -3083,7 +3078,7 @@
 </file>
 
 <file path=ppt/slides/slide1.xml><?xml version="1.0" encoding="utf-8"?>
-<p:sld xmlns:a="http://schemas.openxmlformats.org/drawingml/2006/main" xmlns:p="http://schemas.openxmlformats.org/presentationml/2006/main" xmlns:r="http://schemas.openxmlformats.org/officeDocument/2006/relationships">
+<p:sld xmlns:a="http://schemas.openxmlformats.org/drawingml/2006/main" xmlns:r="http://schemas.openxmlformats.org/officeDocument/2006/relationships" xmlns:p="http://schemas.openxmlformats.org/presentationml/2006/main">
   <p:cSld>
     <p:bg>
       <p:bgPr>
@@ -3099,7 +3094,14 @@
         <p:cNvGrpSpPr/>
         <p:nvPr/>
       </p:nvGrpSpPr>
-      <p:grpSpPr/>
+      <p:grpSpPr>
+        <a:xfrm>
+          <a:off x="0" y="0"/>
+          <a:ext cx="0" cy="0"/>
+          <a:chOff x="0" y="0"/>
+          <a:chExt cx="0" cy="0"/>
+        </a:xfrm>
+      </p:grpSpPr>
       <p:sp>
         <p:nvSpPr>
           <p:cNvPr id="2" name="Rectangle 1"/>
@@ -3140,6 +3142,7 @@
           <a:lstStyle/>
           <a:p>
             <a:pPr algn="ctr"/>
+            <a:endParaRPr/>
           </a:p>
         </p:txBody>
       </p:sp>
@@ -3183,6 +3186,7 @@
           <a:lstStyle/>
           <a:p>
             <a:pPr algn="ctr"/>
+            <a:endParaRPr/>
           </a:p>
         </p:txBody>
       </p:sp>
@@ -3328,6 +3332,7 @@
           <a:lstStyle/>
           <a:p>
             <a:pPr algn="ctr"/>
+            <a:endParaRPr/>
           </a:p>
         </p:txBody>
       </p:sp>
@@ -3439,6 +3444,7 @@
           <a:lstStyle/>
           <a:p>
             <a:pPr algn="ctr"/>
+            <a:endParaRPr/>
           </a:p>
         </p:txBody>
       </p:sp>
@@ -3451,7 +3457,7 @@
 </file>
 
 <file path=ppt/slides/slide2.xml><?xml version="1.0" encoding="utf-8"?>
-<p:sld xmlns:a="http://schemas.openxmlformats.org/drawingml/2006/main" xmlns:p="http://schemas.openxmlformats.org/presentationml/2006/main" xmlns:r="http://schemas.openxmlformats.org/officeDocument/2006/relationships">
+<p:sld xmlns:a="http://schemas.openxmlformats.org/drawingml/2006/main" xmlns:r="http://schemas.openxmlformats.org/officeDocument/2006/relationships" xmlns:p="http://schemas.openxmlformats.org/presentationml/2006/main">
   <p:cSld>
     <p:bg>
       <p:bgPr>
@@ -3467,7 +3473,14 @@
         <p:cNvGrpSpPr/>
         <p:nvPr/>
       </p:nvGrpSpPr>
-      <p:grpSpPr/>
+      <p:grpSpPr>
+        <a:xfrm>
+          <a:off x="0" y="0"/>
+          <a:ext cx="0" cy="0"/>
+          <a:chOff x="0" y="0"/>
+          <a:chExt cx="0" cy="0"/>
+        </a:xfrm>
+      </p:grpSpPr>
       <p:sp>
         <p:nvSpPr>
           <p:cNvPr id="2" name="Rectangle 1"/>
@@ -3508,6 +3521,7 @@
           <a:lstStyle/>
           <a:p>
             <a:pPr algn="ctr"/>
+            <a:endParaRPr/>
           </a:p>
         </p:txBody>
       </p:sp>
@@ -3551,6 +3565,7 @@
           <a:lstStyle/>
           <a:p>
             <a:pPr algn="ctr"/>
+            <a:endParaRPr/>
           </a:p>
         </p:txBody>
       </p:sp>
@@ -3662,6 +3677,7 @@
           <a:lstStyle/>
           <a:p>
             <a:pPr algn="ctr"/>
+            <a:endParaRPr/>
           </a:p>
         </p:txBody>
       </p:sp>
@@ -3705,6 +3721,7 @@
           <a:lstStyle/>
           <a:p>
             <a:pPr algn="ctr"/>
+            <a:endParaRPr/>
           </a:p>
         </p:txBody>
       </p:sp>
@@ -4023,6 +4040,7 @@
           <a:lstStyle/>
           <a:p>
             <a:pPr algn="ctr"/>
+            <a:endParaRPr/>
           </a:p>
         </p:txBody>
       </p:sp>
@@ -4066,6 +4084,7 @@
           <a:lstStyle/>
           <a:p>
             <a:pPr algn="ctr"/>
+            <a:endParaRPr/>
           </a:p>
         </p:txBody>
       </p:sp>
@@ -4143,6 +4162,7 @@
           <a:lstStyle/>
           <a:p>
             <a:pPr algn="ctr"/>
+            <a:endParaRPr/>
           </a:p>
         </p:txBody>
       </p:sp>
@@ -4255,6 +4275,7 @@
           <a:lstStyle/>
           <a:p>
             <a:pPr algn="ctr"/>
+            <a:endParaRPr/>
           </a:p>
         </p:txBody>
       </p:sp>
@@ -4367,6 +4388,7 @@
           <a:lstStyle/>
           <a:p>
             <a:pPr algn="ctr"/>
+            <a:endParaRPr/>
           </a:p>
         </p:txBody>
       </p:sp>
@@ -4479,6 +4501,7 @@
           <a:lstStyle/>
           <a:p>
             <a:pPr algn="ctr"/>
+            <a:endParaRPr/>
           </a:p>
         </p:txBody>
       </p:sp>
@@ -4560,7 +4583,7 @@
 </file>
 
 <file path=ppt/slides/slide3.xml><?xml version="1.0" encoding="utf-8"?>
-<p:sld xmlns:a="http://schemas.openxmlformats.org/drawingml/2006/main" xmlns:p="http://schemas.openxmlformats.org/presentationml/2006/main" xmlns:r="http://schemas.openxmlformats.org/officeDocument/2006/relationships">
+<p:sld xmlns:a="http://schemas.openxmlformats.org/drawingml/2006/main" xmlns:r="http://schemas.openxmlformats.org/officeDocument/2006/relationships" xmlns:p="http://schemas.openxmlformats.org/presentationml/2006/main">
   <p:cSld>
     <p:bg>
       <p:bgPr>
@@ -4576,7 +4599,14 @@
         <p:cNvGrpSpPr/>
         <p:nvPr/>
       </p:nvGrpSpPr>
-      <p:grpSpPr/>
+      <p:grpSpPr>
+        <a:xfrm>
+          <a:off x="0" y="0"/>
+          <a:ext cx="0" cy="0"/>
+          <a:chOff x="0" y="0"/>
+          <a:chExt cx="0" cy="0"/>
+        </a:xfrm>
+      </p:grpSpPr>
       <p:sp>
         <p:nvSpPr>
           <p:cNvPr id="2" name="Rectangle 1"/>
@@ -4617,6 +4647,7 @@
           <a:lstStyle/>
           <a:p>
             <a:pPr algn="ctr"/>
+            <a:endParaRPr/>
           </a:p>
         </p:txBody>
       </p:sp>
@@ -4660,6 +4691,7 @@
           <a:lstStyle/>
           <a:p>
             <a:pPr algn="ctr"/>
+            <a:endParaRPr/>
           </a:p>
         </p:txBody>
       </p:sp>
@@ -4771,6 +4803,7 @@
           <a:lstStyle/>
           <a:p>
             <a:pPr algn="ctr"/>
+            <a:endParaRPr/>
           </a:p>
         </p:txBody>
       </p:sp>
@@ -4814,6 +4847,7 @@
           <a:lstStyle/>
           <a:p>
             <a:pPr algn="ctr"/>
+            <a:endParaRPr/>
           </a:p>
         </p:txBody>
       </p:sp>
@@ -5027,6 +5061,7 @@
           <a:lstStyle/>
           <a:p>
             <a:pPr algn="ctr"/>
+            <a:endParaRPr/>
           </a:p>
         </p:txBody>
       </p:sp>
@@ -5070,6 +5105,7 @@
           <a:lstStyle/>
           <a:p>
             <a:pPr algn="ctr"/>
+            <a:endParaRPr/>
           </a:p>
         </p:txBody>
       </p:sp>
@@ -5283,6 +5319,7 @@
           <a:lstStyle/>
           <a:p>
             <a:pPr algn="ctr"/>
+            <a:endParaRPr/>
           </a:p>
         </p:txBody>
       </p:sp>
@@ -5326,6 +5363,7 @@
           <a:lstStyle/>
           <a:p>
             <a:pPr algn="ctr"/>
+            <a:endParaRPr/>
           </a:p>
         </p:txBody>
       </p:sp>
@@ -5539,6 +5577,7 @@
           <a:lstStyle/>
           <a:p>
             <a:pPr algn="ctr"/>
+            <a:endParaRPr/>
           </a:p>
         </p:txBody>
       </p:sp>
@@ -5582,6 +5621,7 @@
           <a:lstStyle/>
           <a:p>
             <a:pPr algn="ctr"/>
+            <a:endParaRPr/>
           </a:p>
         </p:txBody>
       </p:sp>
@@ -5795,6 +5835,7 @@
           <a:lstStyle/>
           <a:p>
             <a:pPr algn="ctr"/>
+            <a:endParaRPr/>
           </a:p>
         </p:txBody>
       </p:sp>
@@ -5838,6 +5879,7 @@
           <a:lstStyle/>
           <a:p>
             <a:pPr algn="ctr"/>
+            <a:endParaRPr/>
           </a:p>
         </p:txBody>
       </p:sp>
@@ -6051,6 +6093,7 @@
           <a:lstStyle/>
           <a:p>
             <a:pPr algn="ctr"/>
+            <a:endParaRPr/>
           </a:p>
         </p:txBody>
       </p:sp>
@@ -6094,6 +6137,7 @@
           <a:lstStyle/>
           <a:p>
             <a:pPr algn="ctr"/>
+            <a:endParaRPr/>
           </a:p>
         </p:txBody>
       </p:sp>
@@ -6276,7 +6320,7 @@
 </file>
 
 <file path=ppt/slides/slide4.xml><?xml version="1.0" encoding="utf-8"?>
-<p:sld xmlns:a="http://schemas.openxmlformats.org/drawingml/2006/main" xmlns:p="http://schemas.openxmlformats.org/presentationml/2006/main" xmlns:r="http://schemas.openxmlformats.org/officeDocument/2006/relationships">
+<p:sld xmlns:a="http://schemas.openxmlformats.org/drawingml/2006/main" xmlns:r="http://schemas.openxmlformats.org/officeDocument/2006/relationships" xmlns:p="http://schemas.openxmlformats.org/presentationml/2006/main">
   <p:cSld>
     <p:bg>
       <p:bgPr>
@@ -6292,7 +6336,14 @@
         <p:cNvGrpSpPr/>
         <p:nvPr/>
       </p:nvGrpSpPr>
-      <p:grpSpPr/>
+      <p:grpSpPr>
+        <a:xfrm>
+          <a:off x="0" y="0"/>
+          <a:ext cx="0" cy="0"/>
+          <a:chOff x="0" y="0"/>
+          <a:chExt cx="0" cy="0"/>
+        </a:xfrm>
+      </p:grpSpPr>
       <p:sp>
         <p:nvSpPr>
           <p:cNvPr id="2" name="Rectangle 1"/>
@@ -6333,6 +6384,7 @@
           <a:lstStyle/>
           <a:p>
             <a:pPr algn="ctr"/>
+            <a:endParaRPr/>
           </a:p>
         </p:txBody>
       </p:sp>
@@ -6376,6 +6428,7 @@
           <a:lstStyle/>
           <a:p>
             <a:pPr algn="ctr"/>
+            <a:endParaRPr/>
           </a:p>
         </p:txBody>
       </p:sp>
@@ -6487,6 +6540,7 @@
           <a:lstStyle/>
           <a:p>
             <a:pPr algn="ctr"/>
+            <a:endParaRPr/>
           </a:p>
         </p:txBody>
       </p:sp>
@@ -6530,6 +6584,7 @@
           <a:lstStyle/>
           <a:p>
             <a:pPr algn="ctr"/>
+            <a:endParaRPr/>
           </a:p>
         </p:txBody>
       </p:sp>
@@ -6743,6 +6798,7 @@
           <a:lstStyle/>
           <a:p>
             <a:pPr algn="ctr"/>
+            <a:endParaRPr/>
           </a:p>
         </p:txBody>
       </p:sp>
@@ -6786,6 +6842,7 @@
           <a:lstStyle/>
           <a:p>
             <a:pPr algn="ctr"/>
+            <a:endParaRPr/>
           </a:p>
         </p:txBody>
       </p:sp>
@@ -6999,6 +7056,7 @@
           <a:lstStyle/>
           <a:p>
             <a:pPr algn="ctr"/>
+            <a:endParaRPr/>
           </a:p>
         </p:txBody>
       </p:sp>
@@ -7042,6 +7100,7 @@
           <a:lstStyle/>
           <a:p>
             <a:pPr algn="ctr"/>
+            <a:endParaRPr/>
           </a:p>
         </p:txBody>
       </p:sp>
@@ -7255,6 +7314,7 @@
           <a:lstStyle/>
           <a:p>
             <a:pPr algn="ctr"/>
+            <a:endParaRPr/>
           </a:p>
         </p:txBody>
       </p:sp>
@@ -7298,6 +7358,7 @@
           <a:lstStyle/>
           <a:p>
             <a:pPr algn="ctr"/>
+            <a:endParaRPr/>
           </a:p>
         </p:txBody>
       </p:sp>
@@ -7477,6 +7538,7 @@
           <a:lstStyle/>
           <a:p>
             <a:pPr algn="ctr"/>
+            <a:endParaRPr/>
           </a:p>
         </p:txBody>
       </p:sp>
@@ -7520,6 +7582,7 @@
           <a:lstStyle/>
           <a:p>
             <a:pPr algn="ctr"/>
+            <a:endParaRPr/>
           </a:p>
         </p:txBody>
       </p:sp>
@@ -7699,6 +7762,7 @@
           <a:lstStyle/>
           <a:p>
             <a:pPr algn="ctr"/>
+            <a:endParaRPr/>
           </a:p>
         </p:txBody>
       </p:sp>
@@ -7742,6 +7806,7 @@
           <a:lstStyle/>
           <a:p>
             <a:pPr algn="ctr"/>
+            <a:endParaRPr/>
           </a:p>
         </p:txBody>
       </p:sp>
@@ -7921,6 +7986,7 @@
           <a:lstStyle/>
           <a:p>
             <a:pPr algn="ctr"/>
+            <a:endParaRPr/>
           </a:p>
         </p:txBody>
       </p:sp>
@@ -7964,6 +8030,7 @@
           <a:lstStyle/>
           <a:p>
             <a:pPr algn="ctr"/>
+            <a:endParaRPr/>
           </a:p>
         </p:txBody>
       </p:sp>
@@ -8078,7 +8145,7 @@
 </file>
 
 <file path=ppt/slides/slide5.xml><?xml version="1.0" encoding="utf-8"?>
-<p:sld xmlns:a="http://schemas.openxmlformats.org/drawingml/2006/main" xmlns:p="http://schemas.openxmlformats.org/presentationml/2006/main" xmlns:r="http://schemas.openxmlformats.org/officeDocument/2006/relationships">
+<p:sld xmlns:a="http://schemas.openxmlformats.org/drawingml/2006/main" xmlns:r="http://schemas.openxmlformats.org/officeDocument/2006/relationships" xmlns:p="http://schemas.openxmlformats.org/presentationml/2006/main">
   <p:cSld>
     <p:bg>
       <p:bgPr>
@@ -8094,7 +8161,14 @@
         <p:cNvGrpSpPr/>
         <p:nvPr/>
       </p:nvGrpSpPr>
-      <p:grpSpPr/>
+      <p:grpSpPr>
+        <a:xfrm>
+          <a:off x="0" y="0"/>
+          <a:ext cx="0" cy="0"/>
+          <a:chOff x="0" y="0"/>
+          <a:chExt cx="0" cy="0"/>
+        </a:xfrm>
+      </p:grpSpPr>
       <p:sp>
         <p:nvSpPr>
           <p:cNvPr id="2" name="Rectangle 1"/>
@@ -8135,6 +8209,7 @@
           <a:lstStyle/>
           <a:p>
             <a:pPr algn="ctr"/>
+            <a:endParaRPr/>
           </a:p>
         </p:txBody>
       </p:sp>
@@ -8178,6 +8253,7 @@
           <a:lstStyle/>
           <a:p>
             <a:pPr algn="ctr"/>
+            <a:endParaRPr/>
           </a:p>
         </p:txBody>
       </p:sp>
@@ -8189,7 +8265,7 @@
         </p:nvSpPr>
         <p:spPr>
           <a:xfrm>
-            <a:off x="365760" y="137160"/>
+            <a:off x="384048" y="274320"/>
             <a:ext cx="8229600" cy="548640"/>
           </a:xfrm>
           <a:prstGeom prst="rect">
@@ -8239,7 +8315,7 @@
           <a:p>
             <a:pPr algn="l"/>
             <a:r>
-              <a:rPr sz="1400" b="0">
+              <a:rPr sz="1400" b="0" dirty="0">
                 <a:solidFill>
                   <a:srgbClr val="94A3B8"/>
                 </a:solidFill>
@@ -8289,6 +8365,7 @@
           <a:lstStyle/>
           <a:p>
             <a:pPr algn="ctr"/>
+            <a:endParaRPr/>
           </a:p>
         </p:txBody>
       </p:sp>
@@ -8332,6 +8409,7 @@
           <a:lstStyle/>
           <a:p>
             <a:pPr algn="ctr"/>
+            <a:endParaRPr/>
           </a:p>
         </p:txBody>
       </p:sp>
@@ -8478,6 +8556,7 @@
           <a:lstStyle/>
           <a:p>
             <a:pPr algn="ctr"/>
+            <a:endParaRPr/>
           </a:p>
         </p:txBody>
       </p:sp>
@@ -8521,6 +8600,7 @@
           <a:lstStyle/>
           <a:p>
             <a:pPr algn="ctr"/>
+            <a:endParaRPr/>
           </a:p>
         </p:txBody>
       </p:sp>
@@ -8667,6 +8747,7 @@
           <a:lstStyle/>
           <a:p>
             <a:pPr algn="ctr"/>
+            <a:endParaRPr/>
           </a:p>
         </p:txBody>
       </p:sp>
@@ -8710,6 +8791,7 @@
           <a:lstStyle/>
           <a:p>
             <a:pPr algn="ctr"/>
+            <a:endParaRPr/>
           </a:p>
         </p:txBody>
       </p:sp>
@@ -8856,6 +8938,7 @@
           <a:lstStyle/>
           <a:p>
             <a:pPr algn="ctr"/>
+            <a:endParaRPr/>
           </a:p>
         </p:txBody>
       </p:sp>
@@ -8899,6 +8982,7 @@
           <a:lstStyle/>
           <a:p>
             <a:pPr algn="ctr"/>
+            <a:endParaRPr/>
           </a:p>
         </p:txBody>
       </p:sp>
@@ -9045,6 +9129,7 @@
           <a:lstStyle/>
           <a:p>
             <a:pPr algn="ctr"/>
+            <a:endParaRPr/>
           </a:p>
         </p:txBody>
       </p:sp>
@@ -9088,6 +9173,7 @@
           <a:lstStyle/>
           <a:p>
             <a:pPr algn="ctr"/>
+            <a:endParaRPr/>
           </a:p>
         </p:txBody>
       </p:sp>
@@ -9183,7 +9269,7 @@
           <a:p>
             <a:pPr algn="l"/>
             <a:r>
-              <a:rPr sz="1000" b="0">
+              <a:rPr sz="1000" b="0" dirty="0">
                 <a:solidFill>
                   <a:srgbClr val="94A3B8"/>
                 </a:solidFill>
@@ -9234,6 +9320,7 @@
           <a:lstStyle/>
           <a:p>
             <a:pPr algn="ctr"/>
+            <a:endParaRPr dirty="0"/>
           </a:p>
         </p:txBody>
       </p:sp>
@@ -9277,6 +9364,7 @@
           <a:lstStyle/>
           <a:p>
             <a:pPr algn="ctr"/>
+            <a:endParaRPr/>
           </a:p>
         </p:txBody>
       </p:sp>
@@ -9383,6 +9471,187 @@
           </a:p>
         </p:txBody>
       </p:sp>
+      <p:pic>
+        <p:nvPicPr>
+          <p:cNvPr id="36" name="그림 35">
+            <a:extLst>
+              <a:ext uri="{FF2B5EF4-FFF2-40B4-BE49-F238E27FC236}">
+                <a16:creationId xmlns:a16="http://schemas.microsoft.com/office/drawing/2014/main" id="{C63B6D05-AD77-FC55-15AB-BC957B9C88FC}"/>
+              </a:ext>
+            </a:extLst>
+          </p:cNvPr>
+          <p:cNvPicPr>
+            <a:picLocks noChangeAspect="1"/>
+          </p:cNvPicPr>
+          <p:nvPr/>
+        </p:nvPicPr>
+        <p:blipFill>
+          <a:blip r:embed="rId2"/>
+          <a:stretch>
+            <a:fillRect/>
+          </a:stretch>
+        </p:blipFill>
+        <p:spPr>
+          <a:xfrm>
+            <a:off x="3976425" y="1266236"/>
+            <a:ext cx="1830015" cy="1490887"/>
+          </a:xfrm>
+          <a:prstGeom prst="rect">
+            <a:avLst/>
+          </a:prstGeom>
+        </p:spPr>
+      </p:pic>
+      <p:pic>
+        <p:nvPicPr>
+          <p:cNvPr id="37" name="그림 36">
+            <a:extLst>
+              <a:ext uri="{FF2B5EF4-FFF2-40B4-BE49-F238E27FC236}">
+                <a16:creationId xmlns:a16="http://schemas.microsoft.com/office/drawing/2014/main" id="{CECB6196-6609-92E2-59FA-2C6FEF8CF3C8}"/>
+              </a:ext>
+            </a:extLst>
+          </p:cNvPr>
+          <p:cNvPicPr>
+            <a:picLocks noChangeAspect="1"/>
+          </p:cNvPicPr>
+          <p:nvPr/>
+        </p:nvPicPr>
+        <p:blipFill>
+          <a:blip r:embed="rId3"/>
+          <a:stretch>
+            <a:fillRect/>
+          </a:stretch>
+        </p:blipFill>
+        <p:spPr>
+          <a:xfrm>
+            <a:off x="3540435" y="3031235"/>
+            <a:ext cx="2266005" cy="1380743"/>
+          </a:xfrm>
+          <a:prstGeom prst="rect">
+            <a:avLst/>
+          </a:prstGeom>
+        </p:spPr>
+      </p:pic>
+      <p:pic>
+        <p:nvPicPr>
+          <p:cNvPr id="38" name="그림 37">
+            <a:extLst>
+              <a:ext uri="{FF2B5EF4-FFF2-40B4-BE49-F238E27FC236}">
+                <a16:creationId xmlns:a16="http://schemas.microsoft.com/office/drawing/2014/main" id="{9D5D85BD-9C45-1529-4B92-2279F6101B19}"/>
+              </a:ext>
+            </a:extLst>
+          </p:cNvPr>
+          <p:cNvPicPr>
+            <a:picLocks noChangeAspect="1"/>
+          </p:cNvPicPr>
+          <p:nvPr/>
+        </p:nvPicPr>
+        <p:blipFill>
+          <a:blip r:embed="rId4"/>
+          <a:stretch>
+            <a:fillRect/>
+          </a:stretch>
+        </p:blipFill>
+        <p:spPr>
+          <a:xfrm>
+            <a:off x="9279945" y="1275795"/>
+            <a:ext cx="2375667" cy="1481328"/>
+          </a:xfrm>
+          <a:prstGeom prst="rect">
+            <a:avLst/>
+          </a:prstGeom>
+        </p:spPr>
+      </p:pic>
+      <p:pic>
+        <p:nvPicPr>
+          <p:cNvPr id="39" name="그림 38">
+            <a:extLst>
+              <a:ext uri="{FF2B5EF4-FFF2-40B4-BE49-F238E27FC236}">
+                <a16:creationId xmlns:a16="http://schemas.microsoft.com/office/drawing/2014/main" id="{7EA4F2E3-49DD-C01A-8ED9-DA924606693B}"/>
+              </a:ext>
+            </a:extLst>
+          </p:cNvPr>
+          <p:cNvPicPr>
+            <a:picLocks noChangeAspect="1"/>
+          </p:cNvPicPr>
+          <p:nvPr/>
+        </p:nvPicPr>
+        <p:blipFill>
+          <a:blip r:embed="rId5"/>
+          <a:stretch>
+            <a:fillRect/>
+          </a:stretch>
+        </p:blipFill>
+        <p:spPr>
+          <a:xfrm>
+            <a:off x="9360599" y="3108961"/>
+            <a:ext cx="2214358" cy="1380745"/>
+          </a:xfrm>
+          <a:prstGeom prst="rect">
+            <a:avLst/>
+          </a:prstGeom>
+        </p:spPr>
+      </p:pic>
+      <p:pic>
+        <p:nvPicPr>
+          <p:cNvPr id="40" name="그림 39">
+            <a:extLst>
+              <a:ext uri="{FF2B5EF4-FFF2-40B4-BE49-F238E27FC236}">
+                <a16:creationId xmlns:a16="http://schemas.microsoft.com/office/drawing/2014/main" id="{9E428524-BE54-5296-F244-8FA541C7F8E5}"/>
+              </a:ext>
+            </a:extLst>
+          </p:cNvPr>
+          <p:cNvPicPr>
+            <a:picLocks noChangeAspect="1"/>
+          </p:cNvPicPr>
+          <p:nvPr/>
+        </p:nvPicPr>
+        <p:blipFill>
+          <a:blip r:embed="rId6"/>
+          <a:stretch>
+            <a:fillRect/>
+          </a:stretch>
+        </p:blipFill>
+        <p:spPr>
+          <a:xfrm>
+            <a:off x="9279945" y="5020056"/>
+            <a:ext cx="2238449" cy="1124712"/>
+          </a:xfrm>
+          <a:prstGeom prst="rect">
+            <a:avLst/>
+          </a:prstGeom>
+        </p:spPr>
+      </p:pic>
+      <p:pic>
+        <p:nvPicPr>
+          <p:cNvPr id="41" name="그림 40">
+            <a:extLst>
+              <a:ext uri="{FF2B5EF4-FFF2-40B4-BE49-F238E27FC236}">
+                <a16:creationId xmlns:a16="http://schemas.microsoft.com/office/drawing/2014/main" id="{044D89B8-9804-84B7-5D07-FCBCAC1BD2BB}"/>
+              </a:ext>
+            </a:extLst>
+          </p:cNvPr>
+          <p:cNvPicPr>
+            <a:picLocks noChangeAspect="1"/>
+          </p:cNvPicPr>
+          <p:nvPr/>
+        </p:nvPicPr>
+        <p:blipFill>
+          <a:blip r:embed="rId7"/>
+          <a:srcRect t="6042"/>
+          <a:stretch>
+            <a:fillRect/>
+          </a:stretch>
+        </p:blipFill>
+        <p:spPr>
+          <a:xfrm>
+            <a:off x="3550568" y="4887468"/>
+            <a:ext cx="2255872" cy="1378456"/>
+          </a:xfrm>
+          <a:prstGeom prst="rect">
+            <a:avLst/>
+          </a:prstGeom>
+        </p:spPr>
+      </p:pic>
     </p:spTree>
   </p:cSld>
   <p:clrMapOvr>

--- a/문서/WatchService_Agent_Presentation.pptx
+++ b/문서/WatchService_Agent_Presentation.pptx
@@ -3379,7 +3379,7 @@
         <p:spPr>
           <a:xfrm>
             <a:off x="1371600" y="5303520"/>
-            <a:ext cx="9445752" cy="457200"/>
+            <a:ext cx="9445752" cy="276999"/>
           </a:xfrm>
           <a:prstGeom prst="rect">
             <a:avLst/>
@@ -3394,13 +3394,58 @@
           <a:p>
             <a:pPr algn="ctr"/>
             <a:r>
-              <a:rPr sz="1200" b="0">
+              <a:rPr lang="en-US" sz="1200" b="0" dirty="0">
                 <a:solidFill>
                   <a:srgbClr val="94A3B8"/>
                 </a:solidFill>
               </a:rPr>
-              <a:t>Computer Science  |  2026</a:t>
-            </a:r>
+              <a:t>c135086  </a:t>
+            </a:r>
+            <a:r>
+              <a:rPr lang="ko-KR" altLang="en-US" sz="1200" b="0" dirty="0">
+                <a:solidFill>
+                  <a:srgbClr val="94A3B8"/>
+                </a:solidFill>
+              </a:rPr>
+              <a:t>김유민 </a:t>
+            </a:r>
+            <a:r>
+              <a:rPr lang="en-US" altLang="ko-KR" sz="1200" b="0" dirty="0">
+                <a:solidFill>
+                  <a:srgbClr val="94A3B8"/>
+                </a:solidFill>
+              </a:rPr>
+              <a:t>|</a:t>
+            </a:r>
+            <a:r>
+              <a:rPr lang="ko-KR" altLang="en-US" sz="1200" b="0" dirty="0">
+                <a:solidFill>
+                  <a:srgbClr val="94A3B8"/>
+                </a:solidFill>
+              </a:rPr>
+              <a:t> </a:t>
+            </a:r>
+            <a:r>
+              <a:rPr lang="en-US" sz="1200" b="0" dirty="0">
+                <a:solidFill>
+                  <a:srgbClr val="94A3B8"/>
+                </a:solidFill>
+              </a:rPr>
+              <a:t>B898061</a:t>
+            </a:r>
+            <a:r>
+              <a:rPr lang="ko-KR" altLang="en-US" sz="1200" b="0" dirty="0">
+                <a:solidFill>
+                  <a:srgbClr val="94A3B8"/>
+                </a:solidFill>
+              </a:rPr>
+              <a:t> 이상혁</a:t>
+            </a:r>
+            <a:endParaRPr sz="1200" b="0" dirty="0">
+              <a:solidFill>
+                <a:srgbClr val="94A3B8"/>
+              </a:solidFill>
+            </a:endParaRPr>
           </a:p>
         </p:txBody>
       </p:sp>
@@ -6441,7 +6486,7 @@
         <p:spPr>
           <a:xfrm>
             <a:off x="365760" y="137160"/>
-            <a:ext cx="10972800" cy="548640"/>
+            <a:ext cx="10972800" cy="523220"/>
           </a:xfrm>
           <a:prstGeom prst="rect">
             <a:avLst/>
@@ -6456,12 +6501,20 @@
           <a:p>
             <a:pPr algn="l"/>
             <a:r>
-              <a:rPr sz="2800" b="1">
+              <a:rPr lang="en-US" sz="2800" b="1" dirty="0">
                 <a:solidFill>
                   <a:srgbClr val="FFFFFF"/>
                 </a:solidFill>
               </a:rPr>
-              <a:t>Technical Architecture</a:t>
+              <a:t>System</a:t>
+            </a:r>
+            <a:r>
+              <a:rPr sz="2800" b="1" dirty="0">
+                <a:solidFill>
+                  <a:srgbClr val="FFFFFF"/>
+                </a:solidFill>
+              </a:rPr>
+              <a:t> Architecture</a:t>
             </a:r>
           </a:p>
         </p:txBody>

--- a/문서/WatchService_Agent_Presentation.pptx
+++ b/문서/WatchService_Agent_Presentation.pptx
@@ -3394,12 +3394,20 @@
           <a:p>
             <a:pPr algn="ctr"/>
             <a:r>
+              <a:rPr lang="en-US" sz="1200" dirty="0">
+                <a:solidFill>
+                  <a:srgbClr val="94A3B8"/>
+                </a:solidFill>
+              </a:rPr>
+              <a:t>C</a:t>
+            </a:r>
+            <a:r>
               <a:rPr lang="en-US" sz="1200" b="0" dirty="0">
                 <a:solidFill>
                   <a:srgbClr val="94A3B8"/>
                 </a:solidFill>
               </a:rPr>
-              <a:t>c135086  </a:t>
+              <a:t>135086  </a:t>
             </a:r>
             <a:r>
               <a:rPr lang="ko-KR" altLang="en-US" sz="1200" b="0" dirty="0">
@@ -6528,7 +6536,7 @@
         <p:spPr>
           <a:xfrm>
             <a:off x="365760" y="658368"/>
-            <a:ext cx="8229600" cy="365760"/>
+            <a:ext cx="8229600" cy="307777"/>
           </a:xfrm>
           <a:prstGeom prst="rect">
             <a:avLst/>
@@ -6543,1652 +6551,46 @@
           <a:p>
             <a:pPr algn="l"/>
             <a:r>
-              <a:rPr sz="1400" b="0">
+              <a:rPr sz="1400" b="0" dirty="0">
                 <a:solidFill>
                   <a:srgbClr val="94A3B8"/>
                 </a:solidFill>
               </a:rPr>
-              <a:t>System components and data flow</a:t>
-            </a:r>
-          </a:p>
-        </p:txBody>
-      </p:sp>
-      <p:sp>
-        <p:nvSpPr>
-          <p:cNvPr id="6" name="Rectangle 5"/>
-          <p:cNvSpPr/>
-          <p:nvPr/>
-        </p:nvSpPr>
-        <p:spPr>
-          <a:xfrm>
-            <a:off x="320040" y="1143000"/>
-            <a:ext cx="3749039" cy="2286000"/>
-          </a:xfrm>
-          <a:prstGeom prst="rect">
-            <a:avLst/>
-          </a:prstGeom>
-          <a:solidFill>
-            <a:srgbClr val="1E293B"/>
-          </a:solidFill>
-          <a:ln>
-            <a:noFill/>
-          </a:ln>
-        </p:spPr>
-        <p:style>
-          <a:lnRef idx="1">
-            <a:schemeClr val="accent1"/>
-          </a:lnRef>
-          <a:fillRef idx="3">
-            <a:schemeClr val="accent1"/>
-          </a:fillRef>
-          <a:effectRef idx="2">
-            <a:schemeClr val="accent1"/>
-          </a:effectRef>
-          <a:fontRef idx="minor">
-            <a:schemeClr val="lt1"/>
-          </a:fontRef>
-        </p:style>
-        <p:txBody>
-          <a:bodyPr rtlCol="0" anchor="ctr"/>
-          <a:lstStyle/>
-          <a:p>
-            <a:pPr algn="ctr"/>
-            <a:endParaRPr/>
-          </a:p>
-        </p:txBody>
-      </p:sp>
-      <p:sp>
-        <p:nvSpPr>
-          <p:cNvPr id="7" name="Rectangle 6"/>
-          <p:cNvSpPr/>
-          <p:nvPr/>
-        </p:nvSpPr>
-        <p:spPr>
-          <a:xfrm>
-            <a:off x="320040" y="1143000"/>
-            <a:ext cx="3749039" cy="411480"/>
-          </a:xfrm>
-          <a:prstGeom prst="rect">
-            <a:avLst/>
-          </a:prstGeom>
-          <a:solidFill>
-            <a:srgbClr val="162336"/>
-          </a:solidFill>
-          <a:ln>
-            <a:noFill/>
-          </a:ln>
-        </p:spPr>
-        <p:style>
-          <a:lnRef idx="1">
-            <a:schemeClr val="accent1"/>
-          </a:lnRef>
-          <a:fillRef idx="3">
-            <a:schemeClr val="accent1"/>
-          </a:fillRef>
-          <a:effectRef idx="2">
-            <a:schemeClr val="accent1"/>
-          </a:effectRef>
-          <a:fontRef idx="minor">
-            <a:schemeClr val="lt1"/>
-          </a:fontRef>
-        </p:style>
-        <p:txBody>
-          <a:bodyPr rtlCol="0" anchor="ctr"/>
-          <a:lstStyle/>
-          <a:p>
-            <a:pPr algn="ctr"/>
-            <a:endParaRPr/>
-          </a:p>
-        </p:txBody>
-      </p:sp>
-      <p:sp>
-        <p:nvSpPr>
-          <p:cNvPr id="8" name="TextBox 7"/>
-          <p:cNvSpPr txBox="1"/>
-          <p:nvPr/>
-        </p:nvSpPr>
-        <p:spPr>
-          <a:xfrm>
-            <a:off x="457200" y="1188720"/>
-            <a:ext cx="3474720" cy="347472"/>
-          </a:xfrm>
-          <a:prstGeom prst="rect">
-            <a:avLst/>
-          </a:prstGeom>
-          <a:noFill/>
-        </p:spPr>
-        <p:txBody>
-          <a:bodyPr wrap="square">
-            <a:spAutoFit/>
-          </a:bodyPr>
-          <a:lstStyle/>
-          <a:p>
-            <a:pPr algn="l"/>
-            <a:r>
-              <a:rPr sz="1200" b="1">
-                <a:solidFill>
-                  <a:srgbClr val="3B82F6"/>
-                </a:solidFill>
-              </a:rPr>
-              <a:t>Frontend  (React)</a:t>
-            </a:r>
-          </a:p>
-        </p:txBody>
-      </p:sp>
-      <p:sp>
-        <p:nvSpPr>
-          <p:cNvPr id="9" name="TextBox 8"/>
-          <p:cNvSpPr txBox="1"/>
-          <p:nvPr/>
-        </p:nvSpPr>
-        <p:spPr>
-          <a:xfrm>
-            <a:off x="457200" y="1645920"/>
-            <a:ext cx="3474720" cy="384048"/>
-          </a:xfrm>
-          <a:prstGeom prst="rect">
-            <a:avLst/>
-          </a:prstGeom>
-          <a:noFill/>
-        </p:spPr>
-        <p:txBody>
-          <a:bodyPr wrap="square">
-            <a:spAutoFit/>
-          </a:bodyPr>
-          <a:lstStyle/>
-          <a:p>
-            <a:pPr algn="l"/>
-            <a:r>
-              <a:rPr sz="1000" b="0">
-                <a:solidFill>
-                  <a:srgbClr val="F1F5F9"/>
-                </a:solidFill>
-              </a:rPr>
-              <a:t>• React CRA  +  React Router</a:t>
-            </a:r>
-          </a:p>
-        </p:txBody>
-      </p:sp>
-      <p:sp>
-        <p:nvSpPr>
-          <p:cNvPr id="10" name="TextBox 9"/>
-          <p:cNvSpPr txBox="1"/>
-          <p:nvPr/>
-        </p:nvSpPr>
-        <p:spPr>
-          <a:xfrm>
-            <a:off x="457200" y="2075688"/>
-            <a:ext cx="3474720" cy="384048"/>
-          </a:xfrm>
-          <a:prstGeom prst="rect">
-            <a:avLst/>
-          </a:prstGeom>
-          <a:noFill/>
-        </p:spPr>
-        <p:txBody>
-          <a:bodyPr wrap="square">
-            <a:spAutoFit/>
-          </a:bodyPr>
-          <a:lstStyle/>
-          <a:p>
-            <a:pPr algn="l"/>
-            <a:r>
-              <a:rPr sz="1000" b="0">
-                <a:solidFill>
-                  <a:srgbClr val="F1F5F9"/>
-                </a:solidFill>
-              </a:rPr>
-              <a:t>• Polling dashboard (5s interval)</a:t>
-            </a:r>
-          </a:p>
-        </p:txBody>
-      </p:sp>
-      <p:sp>
-        <p:nvSpPr>
-          <p:cNvPr id="11" name="TextBox 10"/>
-          <p:cNvSpPr txBox="1"/>
-          <p:nvPr/>
-        </p:nvSpPr>
-        <p:spPr>
-          <a:xfrm>
-            <a:off x="457200" y="2505456"/>
-            <a:ext cx="3474720" cy="384048"/>
-          </a:xfrm>
-          <a:prstGeom prst="rect">
-            <a:avLst/>
-          </a:prstGeom>
-          <a:noFill/>
-        </p:spPr>
-        <p:txBody>
-          <a:bodyPr wrap="square">
-            <a:spAutoFit/>
-          </a:bodyPr>
-          <a:lstStyle/>
-          <a:p>
-            <a:pPr algn="l"/>
-            <a:r>
-              <a:rPr sz="1000" b="0">
-                <a:solidFill>
-                  <a:srgbClr val="F1F5F9"/>
-                </a:solidFill>
-              </a:rPr>
-              <a:t>• Notifications / Logs / Settings</a:t>
-            </a:r>
-          </a:p>
-        </p:txBody>
-      </p:sp>
-      <p:sp>
-        <p:nvSpPr>
-          <p:cNvPr id="12" name="TextBox 11"/>
-          <p:cNvSpPr txBox="1"/>
-          <p:nvPr/>
-        </p:nvSpPr>
-        <p:spPr>
-          <a:xfrm>
-            <a:off x="4069080" y="2148840"/>
-            <a:ext cx="274320" cy="365760"/>
-          </a:xfrm>
-          <a:prstGeom prst="rect">
-            <a:avLst/>
-          </a:prstGeom>
-          <a:noFill/>
-        </p:spPr>
-        <p:txBody>
-          <a:bodyPr wrap="square">
-            <a:spAutoFit/>
-          </a:bodyPr>
-          <a:lstStyle/>
-          <a:p>
-            <a:pPr algn="ctr"/>
-            <a:r>
-              <a:rPr sz="2000" b="1">
-                <a:solidFill>
-                  <a:srgbClr val="94A3B8"/>
-                </a:solidFill>
-              </a:rPr>
-              <a:t>↔</a:t>
-            </a:r>
-          </a:p>
-        </p:txBody>
-      </p:sp>
-      <p:sp>
-        <p:nvSpPr>
-          <p:cNvPr id="13" name="Rectangle 12"/>
-          <p:cNvSpPr/>
-          <p:nvPr/>
-        </p:nvSpPr>
-        <p:spPr>
-          <a:xfrm>
-            <a:off x="4251959" y="1143000"/>
-            <a:ext cx="3749039" cy="2286000"/>
-          </a:xfrm>
-          <a:prstGeom prst="rect">
-            <a:avLst/>
-          </a:prstGeom>
-          <a:solidFill>
-            <a:srgbClr val="1E293B"/>
-          </a:solidFill>
-          <a:ln>
-            <a:noFill/>
-          </a:ln>
-        </p:spPr>
-        <p:style>
-          <a:lnRef idx="1">
-            <a:schemeClr val="accent1"/>
-          </a:lnRef>
-          <a:fillRef idx="3">
-            <a:schemeClr val="accent1"/>
-          </a:fillRef>
-          <a:effectRef idx="2">
-            <a:schemeClr val="accent1"/>
-          </a:effectRef>
-          <a:fontRef idx="minor">
-            <a:schemeClr val="lt1"/>
-          </a:fontRef>
-        </p:style>
-        <p:txBody>
-          <a:bodyPr rtlCol="0" anchor="ctr"/>
-          <a:lstStyle/>
-          <a:p>
-            <a:pPr algn="ctr"/>
-            <a:endParaRPr/>
-          </a:p>
-        </p:txBody>
-      </p:sp>
-      <p:sp>
-        <p:nvSpPr>
-          <p:cNvPr id="14" name="Rectangle 13"/>
-          <p:cNvSpPr/>
-          <p:nvPr/>
-        </p:nvSpPr>
-        <p:spPr>
-          <a:xfrm>
-            <a:off x="4251959" y="1143000"/>
-            <a:ext cx="3749039" cy="411480"/>
-          </a:xfrm>
-          <a:prstGeom prst="rect">
-            <a:avLst/>
-          </a:prstGeom>
-          <a:solidFill>
-            <a:srgbClr val="162336"/>
-          </a:solidFill>
-          <a:ln>
-            <a:noFill/>
-          </a:ln>
-        </p:spPr>
-        <p:style>
-          <a:lnRef idx="1">
-            <a:schemeClr val="accent1"/>
-          </a:lnRef>
-          <a:fillRef idx="3">
-            <a:schemeClr val="accent1"/>
-          </a:fillRef>
-          <a:effectRef idx="2">
-            <a:schemeClr val="accent1"/>
-          </a:effectRef>
-          <a:fontRef idx="minor">
-            <a:schemeClr val="lt1"/>
-          </a:fontRef>
-        </p:style>
-        <p:txBody>
-          <a:bodyPr rtlCol="0" anchor="ctr"/>
-          <a:lstStyle/>
-          <a:p>
-            <a:pPr algn="ctr"/>
-            <a:endParaRPr/>
-          </a:p>
-        </p:txBody>
-      </p:sp>
-      <p:sp>
-        <p:nvSpPr>
-          <p:cNvPr id="15" name="TextBox 14"/>
-          <p:cNvSpPr txBox="1"/>
-          <p:nvPr/>
-        </p:nvSpPr>
-        <p:spPr>
-          <a:xfrm>
-            <a:off x="4389120" y="1188720"/>
-            <a:ext cx="3474720" cy="347472"/>
-          </a:xfrm>
-          <a:prstGeom prst="rect">
-            <a:avLst/>
-          </a:prstGeom>
-          <a:noFill/>
-        </p:spPr>
-        <p:txBody>
-          <a:bodyPr wrap="square">
-            <a:spAutoFit/>
-          </a:bodyPr>
-          <a:lstStyle/>
-          <a:p>
-            <a:pPr algn="l"/>
-            <a:r>
-              <a:rPr sz="1200" b="1">
-                <a:solidFill>
-                  <a:srgbClr val="3B82F6"/>
-                </a:solidFill>
-              </a:rPr>
-              <a:t>Backend  (Spring Boot 3.5)</a:t>
-            </a:r>
-          </a:p>
-        </p:txBody>
-      </p:sp>
-      <p:sp>
-        <p:nvSpPr>
-          <p:cNvPr id="16" name="TextBox 15"/>
-          <p:cNvSpPr txBox="1"/>
-          <p:nvPr/>
-        </p:nvSpPr>
-        <p:spPr>
-          <a:xfrm>
-            <a:off x="4389120" y="1645920"/>
-            <a:ext cx="3474720" cy="384048"/>
-          </a:xfrm>
-          <a:prstGeom prst="rect">
-            <a:avLst/>
-          </a:prstGeom>
-          <a:noFill/>
-        </p:spPr>
-        <p:txBody>
-          <a:bodyPr wrap="square">
-            <a:spAutoFit/>
-          </a:bodyPr>
-          <a:lstStyle/>
-          <a:p>
-            <a:pPr algn="l"/>
-            <a:r>
-              <a:rPr sz="1000" b="0">
-                <a:solidFill>
-                  <a:srgbClr val="F1F5F9"/>
-                </a:solidFill>
-              </a:rPr>
-              <a:t>• Java 17  +  Gradle</a:t>
-            </a:r>
-          </a:p>
-        </p:txBody>
-      </p:sp>
-      <p:sp>
-        <p:nvSpPr>
-          <p:cNvPr id="17" name="TextBox 16"/>
-          <p:cNvSpPr txBox="1"/>
-          <p:nvPr/>
-        </p:nvSpPr>
-        <p:spPr>
-          <a:xfrm>
-            <a:off x="4389120" y="2075688"/>
-            <a:ext cx="3474720" cy="384048"/>
-          </a:xfrm>
-          <a:prstGeom prst="rect">
-            <a:avLst/>
-          </a:prstGeom>
-          <a:noFill/>
-        </p:spPr>
-        <p:txBody>
-          <a:bodyPr wrap="square">
-            <a:spAutoFit/>
-          </a:bodyPr>
-          <a:lstStyle/>
-          <a:p>
-            <a:pPr algn="l"/>
-            <a:r>
-              <a:rPr sz="1000" b="0">
-                <a:solidFill>
-                  <a:srgbClr val="F1F5F9"/>
-                </a:solidFill>
-              </a:rPr>
-              <a:t>• WatcherService → EventWindowAggregator</a:t>
-            </a:r>
-          </a:p>
-        </p:txBody>
-      </p:sp>
-      <p:sp>
-        <p:nvSpPr>
-          <p:cNvPr id="18" name="TextBox 17"/>
-          <p:cNvSpPr txBox="1"/>
-          <p:nvPr/>
-        </p:nvSpPr>
-        <p:spPr>
-          <a:xfrm>
-            <a:off x="4389120" y="2505456"/>
-            <a:ext cx="3474720" cy="384048"/>
-          </a:xfrm>
-          <a:prstGeom prst="rect">
-            <a:avLst/>
-          </a:prstGeom>
-          <a:noFill/>
-        </p:spPr>
-        <p:txBody>
-          <a:bodyPr wrap="square">
-            <a:spAutoFit/>
-          </a:bodyPr>
-          <a:lstStyle/>
-          <a:p>
-            <a:pPr algn="l"/>
-            <a:r>
-              <a:rPr sz="1000" b="0">
-                <a:solidFill>
-                  <a:srgbClr val="F1F5F9"/>
-                </a:solidFill>
-              </a:rPr>
-              <a:t>• SQLite (JDBC)  ·  JavaMailSender</a:t>
-            </a:r>
-          </a:p>
-        </p:txBody>
-      </p:sp>
-      <p:sp>
-        <p:nvSpPr>
-          <p:cNvPr id="19" name="TextBox 18"/>
-          <p:cNvSpPr txBox="1"/>
-          <p:nvPr/>
-        </p:nvSpPr>
-        <p:spPr>
-          <a:xfrm>
-            <a:off x="8001000" y="2148840"/>
-            <a:ext cx="274320" cy="365760"/>
-          </a:xfrm>
-          <a:prstGeom prst="rect">
-            <a:avLst/>
-          </a:prstGeom>
-          <a:noFill/>
-        </p:spPr>
-        <p:txBody>
-          <a:bodyPr wrap="square">
-            <a:spAutoFit/>
-          </a:bodyPr>
-          <a:lstStyle/>
-          <a:p>
-            <a:pPr algn="ctr"/>
-            <a:r>
-              <a:rPr sz="2000" b="1">
-                <a:solidFill>
-                  <a:srgbClr val="94A3B8"/>
-                </a:solidFill>
-              </a:rPr>
-              <a:t>↔</a:t>
-            </a:r>
-          </a:p>
-        </p:txBody>
-      </p:sp>
-      <p:sp>
-        <p:nvSpPr>
-          <p:cNvPr id="20" name="Rectangle 19"/>
-          <p:cNvSpPr/>
-          <p:nvPr/>
-        </p:nvSpPr>
-        <p:spPr>
-          <a:xfrm>
-            <a:off x="8183879" y="1143000"/>
-            <a:ext cx="3749039" cy="2286000"/>
-          </a:xfrm>
-          <a:prstGeom prst="rect">
-            <a:avLst/>
-          </a:prstGeom>
-          <a:solidFill>
-            <a:srgbClr val="1E293B"/>
-          </a:solidFill>
-          <a:ln>
-            <a:noFill/>
-          </a:ln>
-        </p:spPr>
-        <p:style>
-          <a:lnRef idx="1">
-            <a:schemeClr val="accent1"/>
-          </a:lnRef>
-          <a:fillRef idx="3">
-            <a:schemeClr val="accent1"/>
-          </a:fillRef>
-          <a:effectRef idx="2">
-            <a:schemeClr val="accent1"/>
-          </a:effectRef>
-          <a:fontRef idx="minor">
-            <a:schemeClr val="lt1"/>
-          </a:fontRef>
-        </p:style>
-        <p:txBody>
-          <a:bodyPr rtlCol="0" anchor="ctr"/>
-          <a:lstStyle/>
-          <a:p>
-            <a:pPr algn="ctr"/>
-            <a:endParaRPr/>
-          </a:p>
-        </p:txBody>
-      </p:sp>
-      <p:sp>
-        <p:nvSpPr>
-          <p:cNvPr id="21" name="Rectangle 20"/>
-          <p:cNvSpPr/>
-          <p:nvPr/>
-        </p:nvSpPr>
-        <p:spPr>
-          <a:xfrm>
-            <a:off x="8183879" y="1143000"/>
-            <a:ext cx="3749039" cy="411480"/>
-          </a:xfrm>
-          <a:prstGeom prst="rect">
-            <a:avLst/>
-          </a:prstGeom>
-          <a:solidFill>
-            <a:srgbClr val="162336"/>
-          </a:solidFill>
-          <a:ln>
-            <a:noFill/>
-          </a:ln>
-        </p:spPr>
-        <p:style>
-          <a:lnRef idx="1">
-            <a:schemeClr val="accent1"/>
-          </a:lnRef>
-          <a:fillRef idx="3">
-            <a:schemeClr val="accent1"/>
-          </a:fillRef>
-          <a:effectRef idx="2">
-            <a:schemeClr val="accent1"/>
-          </a:effectRef>
-          <a:fontRef idx="minor">
-            <a:schemeClr val="lt1"/>
-          </a:fontRef>
-        </p:style>
-        <p:txBody>
-          <a:bodyPr rtlCol="0" anchor="ctr"/>
-          <a:lstStyle/>
-          <a:p>
-            <a:pPr algn="ctr"/>
-            <a:endParaRPr/>
-          </a:p>
-        </p:txBody>
-      </p:sp>
-      <p:sp>
-        <p:nvSpPr>
-          <p:cNvPr id="22" name="TextBox 21"/>
-          <p:cNvSpPr txBox="1"/>
-          <p:nvPr/>
-        </p:nvSpPr>
-        <p:spPr>
-          <a:xfrm>
-            <a:off x="8321040" y="1188720"/>
-            <a:ext cx="3474720" cy="347472"/>
-          </a:xfrm>
-          <a:prstGeom prst="rect">
-            <a:avLst/>
-          </a:prstGeom>
-          <a:noFill/>
-        </p:spPr>
-        <p:txBody>
-          <a:bodyPr wrap="square">
-            <a:spAutoFit/>
-          </a:bodyPr>
-          <a:lstStyle/>
-          <a:p>
-            <a:pPr algn="l"/>
-            <a:r>
-              <a:rPr sz="1200" b="1">
-                <a:solidFill>
-                  <a:srgbClr val="3B82F6"/>
-                </a:solidFill>
-              </a:rPr>
-              <a:t>AI Server  (Python)</a:t>
-            </a:r>
-          </a:p>
-        </p:txBody>
-      </p:sp>
-      <p:sp>
-        <p:nvSpPr>
-          <p:cNvPr id="23" name="TextBox 22"/>
-          <p:cNvSpPr txBox="1"/>
-          <p:nvPr/>
-        </p:nvSpPr>
-        <p:spPr>
-          <a:xfrm>
-            <a:off x="8321040" y="1645920"/>
-            <a:ext cx="3474720" cy="384048"/>
-          </a:xfrm>
-          <a:prstGeom prst="rect">
-            <a:avLst/>
-          </a:prstGeom>
-          <a:noFill/>
-        </p:spPr>
-        <p:txBody>
-          <a:bodyPr wrap="square">
-            <a:spAutoFit/>
-          </a:bodyPr>
-          <a:lstStyle/>
-          <a:p>
-            <a:pPr algn="l"/>
-            <a:r>
-              <a:rPr sz="1000" b="0">
-                <a:solidFill>
-                  <a:srgbClr val="F1F5F9"/>
-                </a:solidFill>
-              </a:rPr>
-              <a:t>• FastAPI  +  XGBoost</a:t>
-            </a:r>
-          </a:p>
-        </p:txBody>
-      </p:sp>
-      <p:sp>
-        <p:nvSpPr>
-          <p:cNvPr id="24" name="TextBox 23"/>
-          <p:cNvSpPr txBox="1"/>
-          <p:nvPr/>
-        </p:nvSpPr>
-        <p:spPr>
-          <a:xfrm>
-            <a:off x="8321040" y="2075688"/>
-            <a:ext cx="3474720" cy="384048"/>
-          </a:xfrm>
-          <a:prstGeom prst="rect">
-            <a:avLst/>
-          </a:prstGeom>
-          <a:noFill/>
-        </p:spPr>
-        <p:txBody>
-          <a:bodyPr wrap="square">
-            <a:spAutoFit/>
-          </a:bodyPr>
-          <a:lstStyle/>
-          <a:p>
-            <a:pPr algn="l"/>
-            <a:r>
-              <a:rPr sz="1000" b="0">
-                <a:solidFill>
-                  <a:srgbClr val="F1F5F9"/>
-                </a:solidFill>
-              </a:rPr>
-              <a:t>• POST /api/analyze  (9 features)</a:t>
-            </a:r>
-          </a:p>
-        </p:txBody>
-      </p:sp>
-      <p:sp>
-        <p:nvSpPr>
-          <p:cNvPr id="25" name="TextBox 24"/>
-          <p:cNvSpPr txBox="1"/>
-          <p:nvPr/>
-        </p:nvSpPr>
-        <p:spPr>
-          <a:xfrm>
-            <a:off x="8321040" y="2505456"/>
-            <a:ext cx="3474720" cy="384048"/>
-          </a:xfrm>
-          <a:prstGeom prst="rect">
-            <a:avLst/>
-          </a:prstGeom>
-          <a:noFill/>
-        </p:spPr>
-        <p:txBody>
-          <a:bodyPr wrap="square">
-            <a:spAutoFit/>
-          </a:bodyPr>
-          <a:lstStyle/>
-          <a:p>
-            <a:pPr algn="l"/>
-            <a:r>
-              <a:rPr sz="1000" b="0">
-                <a:solidFill>
-                  <a:srgbClr val="F1F5F9"/>
-                </a:solidFill>
-              </a:rPr>
-              <a:t>• Gemini API  (LLM guidance)</a:t>
-            </a:r>
-          </a:p>
-        </p:txBody>
-      </p:sp>
-      <p:sp>
-        <p:nvSpPr>
-          <p:cNvPr id="26" name="TextBox 25"/>
-          <p:cNvSpPr txBox="1"/>
-          <p:nvPr/>
-        </p:nvSpPr>
-        <p:spPr>
-          <a:xfrm>
-            <a:off x="365760" y="3611880"/>
-            <a:ext cx="3657600" cy="365760"/>
-          </a:xfrm>
-          <a:prstGeom prst="rect">
-            <a:avLst/>
-          </a:prstGeom>
-          <a:noFill/>
-        </p:spPr>
-        <p:txBody>
-          <a:bodyPr wrap="square">
-            <a:spAutoFit/>
-          </a:bodyPr>
-          <a:lstStyle/>
-          <a:p>
-            <a:pPr algn="l"/>
-            <a:r>
-              <a:rPr sz="1300" b="1">
-                <a:solidFill>
-                  <a:srgbClr val="94A3B8"/>
-                </a:solidFill>
-              </a:rPr>
-              <a:t>Data Flow</a:t>
-            </a:r>
-          </a:p>
-        </p:txBody>
-      </p:sp>
-      <p:sp>
-        <p:nvSpPr>
-          <p:cNvPr id="27" name="Rectangle 26"/>
-          <p:cNvSpPr/>
-          <p:nvPr/>
-        </p:nvSpPr>
-        <p:spPr>
-          <a:xfrm>
-            <a:off x="320040" y="4069080"/>
-            <a:ext cx="2743200" cy="2468880"/>
-          </a:xfrm>
-          <a:prstGeom prst="rect">
-            <a:avLst/>
-          </a:prstGeom>
-          <a:solidFill>
-            <a:srgbClr val="1E293B"/>
-          </a:solidFill>
-          <a:ln>
-            <a:noFill/>
-          </a:ln>
-        </p:spPr>
-        <p:style>
-          <a:lnRef idx="1">
-            <a:schemeClr val="accent1"/>
-          </a:lnRef>
-          <a:fillRef idx="3">
-            <a:schemeClr val="accent1"/>
-          </a:fillRef>
-          <a:effectRef idx="2">
-            <a:schemeClr val="accent1"/>
-          </a:effectRef>
-          <a:fontRef idx="minor">
-            <a:schemeClr val="lt1"/>
-          </a:fontRef>
-        </p:style>
-        <p:txBody>
-          <a:bodyPr rtlCol="0" anchor="ctr"/>
-          <a:lstStyle/>
-          <a:p>
-            <a:pPr algn="ctr"/>
-            <a:endParaRPr/>
-          </a:p>
-        </p:txBody>
-      </p:sp>
-      <p:sp>
-        <p:nvSpPr>
-          <p:cNvPr id="28" name="Rectangle 27"/>
-          <p:cNvSpPr/>
-          <p:nvPr/>
-        </p:nvSpPr>
-        <p:spPr>
-          <a:xfrm>
-            <a:off x="320040" y="4069080"/>
-            <a:ext cx="411480" cy="2468880"/>
-          </a:xfrm>
-          <a:prstGeom prst="rect">
-            <a:avLst/>
-          </a:prstGeom>
-          <a:solidFill>
-            <a:srgbClr val="3B82F6"/>
-          </a:solidFill>
-          <a:ln>
-            <a:noFill/>
-          </a:ln>
-        </p:spPr>
-        <p:style>
-          <a:lnRef idx="1">
-            <a:schemeClr val="accent1"/>
-          </a:lnRef>
-          <a:fillRef idx="3">
-            <a:schemeClr val="accent1"/>
-          </a:fillRef>
-          <a:effectRef idx="2">
-            <a:schemeClr val="accent1"/>
-          </a:effectRef>
-          <a:fontRef idx="minor">
-            <a:schemeClr val="lt1"/>
-          </a:fontRef>
-        </p:style>
-        <p:txBody>
-          <a:bodyPr rtlCol="0" anchor="ctr"/>
-          <a:lstStyle/>
-          <a:p>
-            <a:pPr algn="ctr"/>
-            <a:endParaRPr/>
-          </a:p>
-        </p:txBody>
-      </p:sp>
-      <p:sp>
-        <p:nvSpPr>
-          <p:cNvPr id="29" name="TextBox 28"/>
-          <p:cNvSpPr txBox="1"/>
-          <p:nvPr/>
-        </p:nvSpPr>
-        <p:spPr>
-          <a:xfrm>
-            <a:off x="393192" y="4160520"/>
-            <a:ext cx="274320" cy="365760"/>
-          </a:xfrm>
-          <a:prstGeom prst="rect">
-            <a:avLst/>
-          </a:prstGeom>
-          <a:noFill/>
-        </p:spPr>
-        <p:txBody>
-          <a:bodyPr wrap="square">
-            <a:spAutoFit/>
-          </a:bodyPr>
-          <a:lstStyle/>
-          <a:p>
-            <a:pPr algn="ctr"/>
-            <a:r>
-              <a:rPr sz="1400" b="1">
-                <a:solidFill>
-                  <a:srgbClr val="FFFFFF"/>
-                </a:solidFill>
-              </a:rPr>
-              <a:t>1</a:t>
-            </a:r>
-          </a:p>
-        </p:txBody>
-      </p:sp>
-      <p:sp>
-        <p:nvSpPr>
-          <p:cNvPr id="30" name="TextBox 29"/>
-          <p:cNvSpPr txBox="1"/>
-          <p:nvPr/>
-        </p:nvSpPr>
-        <p:spPr>
-          <a:xfrm>
-            <a:off x="868680" y="4133087"/>
-            <a:ext cx="2103120" cy="365760"/>
-          </a:xfrm>
-          <a:prstGeom prst="rect">
-            <a:avLst/>
-          </a:prstGeom>
-          <a:noFill/>
-        </p:spPr>
-        <p:txBody>
-          <a:bodyPr wrap="square">
-            <a:spAutoFit/>
-          </a:bodyPr>
-          <a:lstStyle/>
-          <a:p>
-            <a:pPr algn="l"/>
-            <a:r>
-              <a:rPr sz="1200" b="1">
-                <a:solidFill>
-                  <a:srgbClr val="FFFFFF"/>
-                </a:solidFill>
-              </a:rPr>
-              <a:t>File Event</a:t>
-            </a:r>
-          </a:p>
-        </p:txBody>
-      </p:sp>
-      <p:sp>
-        <p:nvSpPr>
-          <p:cNvPr id="31" name="TextBox 30"/>
-          <p:cNvSpPr txBox="1"/>
-          <p:nvPr/>
-        </p:nvSpPr>
-        <p:spPr>
-          <a:xfrm>
-            <a:off x="822960" y="4553712"/>
-            <a:ext cx="2148840" cy="1645920"/>
-          </a:xfrm>
-          <a:prstGeom prst="rect">
-            <a:avLst/>
-          </a:prstGeom>
-          <a:noFill/>
-        </p:spPr>
-        <p:txBody>
-          <a:bodyPr wrap="square">
-            <a:spAutoFit/>
-          </a:bodyPr>
-          <a:lstStyle/>
-          <a:p>
-            <a:pPr algn="l"/>
-            <a:r>
-              <a:rPr sz="1000" b="0">
-                <a:solidFill>
-                  <a:srgbClr val="94A3B8"/>
-                </a:solidFill>
-              </a:rPr>
-              <a:t>NIO WatchService detects CREATE / MODIFY / DELETE</a:t>
-            </a:r>
-          </a:p>
-        </p:txBody>
-      </p:sp>
-      <p:sp>
-        <p:nvSpPr>
-          <p:cNvPr id="32" name="TextBox 31"/>
-          <p:cNvSpPr txBox="1"/>
-          <p:nvPr/>
-        </p:nvSpPr>
-        <p:spPr>
-          <a:xfrm>
-            <a:off x="3200400" y="5074920"/>
-            <a:ext cx="182880" cy="365760"/>
-          </a:xfrm>
-          <a:prstGeom prst="rect">
-            <a:avLst/>
-          </a:prstGeom>
-          <a:noFill/>
-        </p:spPr>
-        <p:txBody>
-          <a:bodyPr wrap="square">
-            <a:spAutoFit/>
-          </a:bodyPr>
-          <a:lstStyle/>
-          <a:p>
-            <a:pPr algn="ctr"/>
-            <a:r>
-              <a:rPr sz="1600" b="1">
-                <a:solidFill>
-                  <a:srgbClr val="94A3B8"/>
-                </a:solidFill>
-              </a:rPr>
-              <a:t>→</a:t>
-            </a:r>
-          </a:p>
-        </p:txBody>
-      </p:sp>
-      <p:sp>
-        <p:nvSpPr>
-          <p:cNvPr id="33" name="Rectangle 32"/>
-          <p:cNvSpPr/>
-          <p:nvPr/>
-        </p:nvSpPr>
-        <p:spPr>
-          <a:xfrm>
-            <a:off x="3246120" y="4069080"/>
-            <a:ext cx="2743200" cy="2468880"/>
-          </a:xfrm>
-          <a:prstGeom prst="rect">
-            <a:avLst/>
-          </a:prstGeom>
-          <a:solidFill>
-            <a:srgbClr val="1E293B"/>
-          </a:solidFill>
-          <a:ln>
-            <a:noFill/>
-          </a:ln>
-        </p:spPr>
-        <p:style>
-          <a:lnRef idx="1">
-            <a:schemeClr val="accent1"/>
-          </a:lnRef>
-          <a:fillRef idx="3">
-            <a:schemeClr val="accent1"/>
-          </a:fillRef>
-          <a:effectRef idx="2">
-            <a:schemeClr val="accent1"/>
-          </a:effectRef>
-          <a:fontRef idx="minor">
-            <a:schemeClr val="lt1"/>
-          </a:fontRef>
-        </p:style>
-        <p:txBody>
-          <a:bodyPr rtlCol="0" anchor="ctr"/>
-          <a:lstStyle/>
-          <a:p>
-            <a:pPr algn="ctr"/>
-            <a:endParaRPr/>
-          </a:p>
-        </p:txBody>
-      </p:sp>
-      <p:sp>
-        <p:nvSpPr>
-          <p:cNvPr id="34" name="Rectangle 33"/>
-          <p:cNvSpPr/>
-          <p:nvPr/>
-        </p:nvSpPr>
-        <p:spPr>
-          <a:xfrm>
-            <a:off x="3246120" y="4069080"/>
-            <a:ext cx="411480" cy="2468880"/>
-          </a:xfrm>
-          <a:prstGeom prst="rect">
-            <a:avLst/>
-          </a:prstGeom>
-          <a:solidFill>
-            <a:srgbClr val="3B82F6"/>
-          </a:solidFill>
-          <a:ln>
-            <a:noFill/>
-          </a:ln>
-        </p:spPr>
-        <p:style>
-          <a:lnRef idx="1">
-            <a:schemeClr val="accent1"/>
-          </a:lnRef>
-          <a:fillRef idx="3">
-            <a:schemeClr val="accent1"/>
-          </a:fillRef>
-          <a:effectRef idx="2">
-            <a:schemeClr val="accent1"/>
-          </a:effectRef>
-          <a:fontRef idx="minor">
-            <a:schemeClr val="lt1"/>
-          </a:fontRef>
-        </p:style>
-        <p:txBody>
-          <a:bodyPr rtlCol="0" anchor="ctr"/>
-          <a:lstStyle/>
-          <a:p>
-            <a:pPr algn="ctr"/>
-            <a:endParaRPr/>
-          </a:p>
-        </p:txBody>
-      </p:sp>
-      <p:sp>
-        <p:nvSpPr>
-          <p:cNvPr id="35" name="TextBox 34"/>
-          <p:cNvSpPr txBox="1"/>
-          <p:nvPr/>
-        </p:nvSpPr>
-        <p:spPr>
-          <a:xfrm>
-            <a:off x="3319272" y="4160520"/>
-            <a:ext cx="274320" cy="365760"/>
-          </a:xfrm>
-          <a:prstGeom prst="rect">
-            <a:avLst/>
-          </a:prstGeom>
-          <a:noFill/>
-        </p:spPr>
-        <p:txBody>
-          <a:bodyPr wrap="square">
-            <a:spAutoFit/>
-          </a:bodyPr>
-          <a:lstStyle/>
-          <a:p>
-            <a:pPr algn="ctr"/>
-            <a:r>
-              <a:rPr sz="1400" b="1">
-                <a:solidFill>
-                  <a:srgbClr val="FFFFFF"/>
-                </a:solidFill>
-              </a:rPr>
-              <a:t>2</a:t>
-            </a:r>
-          </a:p>
-        </p:txBody>
-      </p:sp>
-      <p:sp>
-        <p:nvSpPr>
-          <p:cNvPr id="36" name="TextBox 35"/>
-          <p:cNvSpPr txBox="1"/>
-          <p:nvPr/>
-        </p:nvSpPr>
-        <p:spPr>
-          <a:xfrm>
-            <a:off x="3794760" y="4133087"/>
-            <a:ext cx="2103120" cy="365760"/>
-          </a:xfrm>
-          <a:prstGeom prst="rect">
-            <a:avLst/>
-          </a:prstGeom>
-          <a:noFill/>
-        </p:spPr>
-        <p:txBody>
-          <a:bodyPr wrap="square">
-            <a:spAutoFit/>
-          </a:bodyPr>
-          <a:lstStyle/>
-          <a:p>
-            <a:pPr algn="l"/>
-            <a:r>
-              <a:rPr sz="1200" b="1">
-                <a:solidFill>
-                  <a:srgbClr val="FFFFFF"/>
-                </a:solidFill>
-              </a:rPr>
-              <a:t>3s Window</a:t>
-            </a:r>
-          </a:p>
-        </p:txBody>
-      </p:sp>
-      <p:sp>
-        <p:nvSpPr>
-          <p:cNvPr id="37" name="TextBox 36"/>
-          <p:cNvSpPr txBox="1"/>
-          <p:nvPr/>
-        </p:nvSpPr>
-        <p:spPr>
-          <a:xfrm>
-            <a:off x="3749040" y="4553712"/>
-            <a:ext cx="2148840" cy="1645920"/>
-          </a:xfrm>
-          <a:prstGeom prst="rect">
-            <a:avLst/>
-          </a:prstGeom>
-          <a:noFill/>
-        </p:spPr>
-        <p:txBody>
-          <a:bodyPr wrap="square">
-            <a:spAutoFit/>
-          </a:bodyPr>
-          <a:lstStyle/>
-          <a:p>
-            <a:pPr algn="l"/>
-            <a:r>
-              <a:rPr sz="1000" b="0">
-                <a:solidFill>
-                  <a:srgbClr val="94A3B8"/>
-                </a:solidFill>
-              </a:rPr>
-              <a:t>Aggregate events → compute 9 feature vectors</a:t>
-            </a:r>
-          </a:p>
-        </p:txBody>
-      </p:sp>
-      <p:sp>
-        <p:nvSpPr>
-          <p:cNvPr id="38" name="TextBox 37"/>
-          <p:cNvSpPr txBox="1"/>
-          <p:nvPr/>
-        </p:nvSpPr>
-        <p:spPr>
-          <a:xfrm>
-            <a:off x="6126480" y="5074920"/>
-            <a:ext cx="182880" cy="365760"/>
-          </a:xfrm>
-          <a:prstGeom prst="rect">
-            <a:avLst/>
-          </a:prstGeom>
-          <a:noFill/>
-        </p:spPr>
-        <p:txBody>
-          <a:bodyPr wrap="square">
-            <a:spAutoFit/>
-          </a:bodyPr>
-          <a:lstStyle/>
-          <a:p>
-            <a:pPr algn="ctr"/>
-            <a:r>
-              <a:rPr sz="1600" b="1">
-                <a:solidFill>
-                  <a:srgbClr val="94A3B8"/>
-                </a:solidFill>
-              </a:rPr>
-              <a:t>→</a:t>
-            </a:r>
-          </a:p>
-        </p:txBody>
-      </p:sp>
-      <p:sp>
-        <p:nvSpPr>
-          <p:cNvPr id="39" name="Rectangle 38"/>
-          <p:cNvSpPr/>
-          <p:nvPr/>
-        </p:nvSpPr>
-        <p:spPr>
-          <a:xfrm>
-            <a:off x="6172200" y="4069080"/>
-            <a:ext cx="2743200" cy="2468880"/>
-          </a:xfrm>
-          <a:prstGeom prst="rect">
-            <a:avLst/>
-          </a:prstGeom>
-          <a:solidFill>
-            <a:srgbClr val="1E293B"/>
-          </a:solidFill>
-          <a:ln>
-            <a:noFill/>
-          </a:ln>
-        </p:spPr>
-        <p:style>
-          <a:lnRef idx="1">
-            <a:schemeClr val="accent1"/>
-          </a:lnRef>
-          <a:fillRef idx="3">
-            <a:schemeClr val="accent1"/>
-          </a:fillRef>
-          <a:effectRef idx="2">
-            <a:schemeClr val="accent1"/>
-          </a:effectRef>
-          <a:fontRef idx="minor">
-            <a:schemeClr val="lt1"/>
-          </a:fontRef>
-        </p:style>
-        <p:txBody>
-          <a:bodyPr rtlCol="0" anchor="ctr"/>
-          <a:lstStyle/>
-          <a:p>
-            <a:pPr algn="ctr"/>
-            <a:endParaRPr/>
-          </a:p>
-        </p:txBody>
-      </p:sp>
-      <p:sp>
-        <p:nvSpPr>
-          <p:cNvPr id="40" name="Rectangle 39"/>
-          <p:cNvSpPr/>
-          <p:nvPr/>
-        </p:nvSpPr>
-        <p:spPr>
-          <a:xfrm>
-            <a:off x="6172200" y="4069080"/>
-            <a:ext cx="411480" cy="2468880"/>
-          </a:xfrm>
-          <a:prstGeom prst="rect">
-            <a:avLst/>
-          </a:prstGeom>
-          <a:solidFill>
-            <a:srgbClr val="F59E0B"/>
-          </a:solidFill>
-          <a:ln>
-            <a:noFill/>
-          </a:ln>
-        </p:spPr>
-        <p:style>
-          <a:lnRef idx="1">
-            <a:schemeClr val="accent1"/>
-          </a:lnRef>
-          <a:fillRef idx="3">
-            <a:schemeClr val="accent1"/>
-          </a:fillRef>
-          <a:effectRef idx="2">
-            <a:schemeClr val="accent1"/>
-          </a:effectRef>
-          <a:fontRef idx="minor">
-            <a:schemeClr val="lt1"/>
-          </a:fontRef>
-        </p:style>
-        <p:txBody>
-          <a:bodyPr rtlCol="0" anchor="ctr"/>
-          <a:lstStyle/>
-          <a:p>
-            <a:pPr algn="ctr"/>
-            <a:endParaRPr/>
-          </a:p>
-        </p:txBody>
-      </p:sp>
-      <p:sp>
-        <p:nvSpPr>
-          <p:cNvPr id="41" name="TextBox 40"/>
-          <p:cNvSpPr txBox="1"/>
-          <p:nvPr/>
-        </p:nvSpPr>
-        <p:spPr>
-          <a:xfrm>
-            <a:off x="6245352" y="4160520"/>
-            <a:ext cx="274320" cy="365760"/>
-          </a:xfrm>
-          <a:prstGeom prst="rect">
-            <a:avLst/>
-          </a:prstGeom>
-          <a:noFill/>
-        </p:spPr>
-        <p:txBody>
-          <a:bodyPr wrap="square">
-            <a:spAutoFit/>
-          </a:bodyPr>
-          <a:lstStyle/>
-          <a:p>
-            <a:pPr algn="ctr"/>
-            <a:r>
-              <a:rPr sz="1400" b="1">
-                <a:solidFill>
-                  <a:srgbClr val="FFFFFF"/>
-                </a:solidFill>
-              </a:rPr>
-              <a:t>3</a:t>
-            </a:r>
-          </a:p>
-        </p:txBody>
-      </p:sp>
-      <p:sp>
-        <p:nvSpPr>
-          <p:cNvPr id="42" name="TextBox 41"/>
-          <p:cNvSpPr txBox="1"/>
-          <p:nvPr/>
-        </p:nvSpPr>
-        <p:spPr>
-          <a:xfrm>
-            <a:off x="6720840" y="4133087"/>
-            <a:ext cx="2103120" cy="365760"/>
-          </a:xfrm>
-          <a:prstGeom prst="rect">
-            <a:avLst/>
-          </a:prstGeom>
-          <a:noFill/>
-        </p:spPr>
-        <p:txBody>
-          <a:bodyPr wrap="square">
-            <a:spAutoFit/>
-          </a:bodyPr>
-          <a:lstStyle/>
-          <a:p>
-            <a:pPr algn="l"/>
-            <a:r>
-              <a:rPr sz="1200" b="1">
-                <a:solidFill>
-                  <a:srgbClr val="FFFFFF"/>
-                </a:solidFill>
-              </a:rPr>
-              <a:t>AI Analyze</a:t>
-            </a:r>
-          </a:p>
-        </p:txBody>
-      </p:sp>
-      <p:sp>
-        <p:nvSpPr>
-          <p:cNvPr id="43" name="TextBox 42"/>
-          <p:cNvSpPr txBox="1"/>
-          <p:nvPr/>
-        </p:nvSpPr>
-        <p:spPr>
-          <a:xfrm>
-            <a:off x="6675120" y="4553712"/>
-            <a:ext cx="2148840" cy="1645920"/>
-          </a:xfrm>
-          <a:prstGeom prst="rect">
-            <a:avLst/>
-          </a:prstGeom>
-          <a:noFill/>
-        </p:spPr>
-        <p:txBody>
-          <a:bodyPr wrap="square">
-            <a:spAutoFit/>
-          </a:bodyPr>
-          <a:lstStyle/>
-          <a:p>
-            <a:pPr algn="l"/>
-            <a:r>
-              <a:rPr sz="1000" b="0">
-                <a:solidFill>
-                  <a:srgbClr val="94A3B8"/>
-                </a:solidFill>
-              </a:rPr>
-              <a:t>XGBoost returns score → SAFE / WARNING / DANGER</a:t>
-            </a:r>
-          </a:p>
-        </p:txBody>
-      </p:sp>
-      <p:sp>
-        <p:nvSpPr>
-          <p:cNvPr id="44" name="TextBox 43"/>
-          <p:cNvSpPr txBox="1"/>
-          <p:nvPr/>
-        </p:nvSpPr>
-        <p:spPr>
-          <a:xfrm>
-            <a:off x="9052560" y="5074920"/>
-            <a:ext cx="182880" cy="365760"/>
-          </a:xfrm>
-          <a:prstGeom prst="rect">
-            <a:avLst/>
-          </a:prstGeom>
-          <a:noFill/>
-        </p:spPr>
-        <p:txBody>
-          <a:bodyPr wrap="square">
-            <a:spAutoFit/>
-          </a:bodyPr>
-          <a:lstStyle/>
-          <a:p>
-            <a:pPr algn="ctr"/>
-            <a:r>
-              <a:rPr sz="1600" b="1">
-                <a:solidFill>
-                  <a:srgbClr val="94A3B8"/>
-                </a:solidFill>
-              </a:rPr>
-              <a:t>→</a:t>
-            </a:r>
-          </a:p>
-        </p:txBody>
-      </p:sp>
-      <p:sp>
-        <p:nvSpPr>
-          <p:cNvPr id="45" name="Rectangle 44"/>
-          <p:cNvSpPr/>
-          <p:nvPr/>
-        </p:nvSpPr>
-        <p:spPr>
-          <a:xfrm>
-            <a:off x="9098280" y="4069080"/>
-            <a:ext cx="2743200" cy="2468880"/>
-          </a:xfrm>
-          <a:prstGeom prst="rect">
-            <a:avLst/>
-          </a:prstGeom>
-          <a:solidFill>
-            <a:srgbClr val="1E293B"/>
-          </a:solidFill>
-          <a:ln>
-            <a:noFill/>
-          </a:ln>
-        </p:spPr>
-        <p:style>
-          <a:lnRef idx="1">
-            <a:schemeClr val="accent1"/>
-          </a:lnRef>
-          <a:fillRef idx="3">
-            <a:schemeClr val="accent1"/>
-          </a:fillRef>
-          <a:effectRef idx="2">
-            <a:schemeClr val="accent1"/>
-          </a:effectRef>
-          <a:fontRef idx="minor">
-            <a:schemeClr val="lt1"/>
-          </a:fontRef>
-        </p:style>
-        <p:txBody>
-          <a:bodyPr rtlCol="0" anchor="ctr"/>
-          <a:lstStyle/>
-          <a:p>
-            <a:pPr algn="ctr"/>
-            <a:endParaRPr/>
-          </a:p>
-        </p:txBody>
-      </p:sp>
-      <p:sp>
-        <p:nvSpPr>
-          <p:cNvPr id="46" name="Rectangle 45"/>
-          <p:cNvSpPr/>
-          <p:nvPr/>
-        </p:nvSpPr>
-        <p:spPr>
-          <a:xfrm>
-            <a:off x="9098280" y="4069080"/>
-            <a:ext cx="411480" cy="2468880"/>
-          </a:xfrm>
-          <a:prstGeom prst="rect">
-            <a:avLst/>
-          </a:prstGeom>
-          <a:solidFill>
-            <a:srgbClr val="EF4444"/>
-          </a:solidFill>
-          <a:ln>
-            <a:noFill/>
-          </a:ln>
-        </p:spPr>
-        <p:style>
-          <a:lnRef idx="1">
-            <a:schemeClr val="accent1"/>
-          </a:lnRef>
-          <a:fillRef idx="3">
-            <a:schemeClr val="accent1"/>
-          </a:fillRef>
-          <a:effectRef idx="2">
-            <a:schemeClr val="accent1"/>
-          </a:effectRef>
-          <a:fontRef idx="minor">
-            <a:schemeClr val="lt1"/>
-          </a:fontRef>
-        </p:style>
-        <p:txBody>
-          <a:bodyPr rtlCol="0" anchor="ctr"/>
-          <a:lstStyle/>
-          <a:p>
-            <a:pPr algn="ctr"/>
-            <a:endParaRPr/>
-          </a:p>
-        </p:txBody>
-      </p:sp>
-      <p:sp>
-        <p:nvSpPr>
-          <p:cNvPr id="47" name="TextBox 46"/>
-          <p:cNvSpPr txBox="1"/>
-          <p:nvPr/>
-        </p:nvSpPr>
-        <p:spPr>
-          <a:xfrm>
-            <a:off x="9171432" y="4160520"/>
-            <a:ext cx="274320" cy="365760"/>
-          </a:xfrm>
-          <a:prstGeom prst="rect">
-            <a:avLst/>
-          </a:prstGeom>
-          <a:noFill/>
-        </p:spPr>
-        <p:txBody>
-          <a:bodyPr wrap="square">
-            <a:spAutoFit/>
-          </a:bodyPr>
-          <a:lstStyle/>
-          <a:p>
-            <a:pPr algn="ctr"/>
-            <a:r>
-              <a:rPr sz="1400" b="1">
-                <a:solidFill>
-                  <a:srgbClr val="FFFFFF"/>
-                </a:solidFill>
-              </a:rPr>
-              <a:t>4</a:t>
-            </a:r>
-          </a:p>
-        </p:txBody>
-      </p:sp>
-      <p:sp>
-        <p:nvSpPr>
-          <p:cNvPr id="48" name="TextBox 47"/>
-          <p:cNvSpPr txBox="1"/>
-          <p:nvPr/>
-        </p:nvSpPr>
-        <p:spPr>
-          <a:xfrm>
-            <a:off x="9646920" y="4133087"/>
-            <a:ext cx="2103120" cy="365760"/>
-          </a:xfrm>
-          <a:prstGeom prst="rect">
-            <a:avLst/>
-          </a:prstGeom>
-          <a:noFill/>
-        </p:spPr>
-        <p:txBody>
-          <a:bodyPr wrap="square">
-            <a:spAutoFit/>
-          </a:bodyPr>
-          <a:lstStyle/>
-          <a:p>
-            <a:pPr algn="l"/>
-            <a:r>
-              <a:rPr sz="1200" b="1">
-                <a:solidFill>
-                  <a:srgbClr val="FFFFFF"/>
-                </a:solidFill>
-              </a:rPr>
-              <a:t>DANGER?</a:t>
-            </a:r>
-          </a:p>
-        </p:txBody>
-      </p:sp>
-      <p:sp>
-        <p:nvSpPr>
-          <p:cNvPr id="49" name="TextBox 48"/>
-          <p:cNvSpPr txBox="1"/>
-          <p:nvPr/>
-        </p:nvSpPr>
-        <p:spPr>
-          <a:xfrm>
-            <a:off x="9601200" y="4553712"/>
-            <a:ext cx="2148840" cy="1645920"/>
-          </a:xfrm>
-          <a:prstGeom prst="rect">
-            <a:avLst/>
-          </a:prstGeom>
-          <a:noFill/>
-        </p:spPr>
-        <p:txBody>
-          <a:bodyPr wrap="square">
-            <a:spAutoFit/>
-          </a:bodyPr>
-          <a:lstStyle/>
-          <a:p>
-            <a:pPr algn="l"/>
-            <a:r>
-              <a:rPr sz="1000" b="0">
-                <a:solidFill>
-                  <a:srgbClr val="94A3B8"/>
-                </a:solidFill>
-              </a:rPr>
-              <a:t>Fullscreen popup + Email + Gemini guidance</a:t>
-            </a:r>
-          </a:p>
-        </p:txBody>
-      </p:sp>
+              <a:t>System components and flow</a:t>
+            </a:r>
+          </a:p>
+        </p:txBody>
+      </p:sp>
+      <p:pic>
+        <p:nvPicPr>
+          <p:cNvPr id="53" name="그림 52">
+            <a:extLst>
+              <a:ext uri="{FF2B5EF4-FFF2-40B4-BE49-F238E27FC236}">
+                <a16:creationId xmlns:a16="http://schemas.microsoft.com/office/drawing/2014/main" id="{248FBC0D-45FC-0BBC-27A9-5A14107B9D0F}"/>
+              </a:ext>
+            </a:extLst>
+          </p:cNvPr>
+          <p:cNvPicPr>
+            <a:picLocks noChangeAspect="1"/>
+          </p:cNvPicPr>
+          <p:nvPr/>
+        </p:nvPicPr>
+        <p:blipFill>
+          <a:blip r:embed="rId2"/>
+          <a:stretch>
+            <a:fillRect/>
+          </a:stretch>
+        </p:blipFill>
+        <p:spPr>
+          <a:xfrm>
+            <a:off x="1965960" y="1102794"/>
+            <a:ext cx="7772400" cy="5094826"/>
+          </a:xfrm>
+          <a:prstGeom prst="rect">
+            <a:avLst/>
+          </a:prstGeom>
+        </p:spPr>
+      </p:pic>
     </p:spTree>
   </p:cSld>
   <p:clrMapOvr>
